--- a/public/lessons/year-6-maths/autumn/week-7/use-mental-addition-and-subtraction-strategies/teaching-powerpoint-v1.pptx
+++ b/public/lessons/year-6-maths/autumn/week-7/use-mental-addition-and-subtraction-strategies/teaching-powerpoint-v1.pptx
@@ -2,24 +2,24 @@
 <file path=ppt/presentation.xml><?xml version="1.0" encoding="utf-8"?>
 <p:presentation xmlns:p="http://schemas.openxmlformats.org/presentationml/2006/main">
   <p:sldMasterIdLst>
-    <p:sldMasterId xmlns:r="http://schemas.openxmlformats.org/officeDocument/2006/relationships" id="2147483648" r:id="R70471d2556f94b70"/>
+    <p:sldMasterId xmlns:r="http://schemas.openxmlformats.org/officeDocument/2006/relationships" id="2147483648" r:id="R6045bb499bd74f96"/>
   </p:sldMasterIdLst>
   <p:notesMasterIdLst>
-    <p:notesMasterId xmlns:r="http://schemas.openxmlformats.org/officeDocument/2006/relationships" r:id="R4fcf56471ba94f5b"/>
+    <p:notesMasterId xmlns:r="http://schemas.openxmlformats.org/officeDocument/2006/relationships" r:id="R9ff9ae9c05d6486f"/>
   </p:notesMasterIdLst>
   <p:sldIdLst>
-    <p:sldId xmlns:r="http://schemas.openxmlformats.org/officeDocument/2006/relationships" id="256" r:id="Rd989f1f1b73641d2"/>
-    <p:sldId xmlns:r="http://schemas.openxmlformats.org/officeDocument/2006/relationships" id="257" r:id="Ra0c933ebd4f144a7"/>
-    <p:sldId xmlns:r="http://schemas.openxmlformats.org/officeDocument/2006/relationships" id="258" r:id="Rdf2e4184dfc84b1a"/>
-    <p:sldId xmlns:r="http://schemas.openxmlformats.org/officeDocument/2006/relationships" id="259" r:id="Rf905bdbeabb846f3"/>
-    <p:sldId xmlns:r="http://schemas.openxmlformats.org/officeDocument/2006/relationships" id="260" r:id="R125665c2fe444506"/>
-    <p:sldId xmlns:r="http://schemas.openxmlformats.org/officeDocument/2006/relationships" id="261" r:id="Rb390cc6ccd06464e"/>
-    <p:sldId xmlns:r="http://schemas.openxmlformats.org/officeDocument/2006/relationships" id="262" r:id="Rdf5d43348ef64e46"/>
-    <p:sldId xmlns:r="http://schemas.openxmlformats.org/officeDocument/2006/relationships" id="263" r:id="R15598fbf6073446a"/>
-    <p:sldId xmlns:r="http://schemas.openxmlformats.org/officeDocument/2006/relationships" id="264" r:id="Re3638b63131347b4"/>
-    <p:sldId xmlns:r="http://schemas.openxmlformats.org/officeDocument/2006/relationships" id="265" r:id="R7a7b7eebdd734f8c"/>
-    <p:sldId xmlns:r="http://schemas.openxmlformats.org/officeDocument/2006/relationships" id="266" r:id="R8058a9dfdfb84e41"/>
-    <p:sldId xmlns:r="http://schemas.openxmlformats.org/officeDocument/2006/relationships" id="267" r:id="Re2f30d89ba6a4897"/>
+    <p:sldId xmlns:r="http://schemas.openxmlformats.org/officeDocument/2006/relationships" id="256" r:id="R37103a0b0388436c"/>
+    <p:sldId xmlns:r="http://schemas.openxmlformats.org/officeDocument/2006/relationships" id="257" r:id="R22394ddd655e4a6f"/>
+    <p:sldId xmlns:r="http://schemas.openxmlformats.org/officeDocument/2006/relationships" id="258" r:id="R41863ad843434092"/>
+    <p:sldId xmlns:r="http://schemas.openxmlformats.org/officeDocument/2006/relationships" id="259" r:id="Rcfc7e90e9d294774"/>
+    <p:sldId xmlns:r="http://schemas.openxmlformats.org/officeDocument/2006/relationships" id="260" r:id="R5bd412e0c8a54ef8"/>
+    <p:sldId xmlns:r="http://schemas.openxmlformats.org/officeDocument/2006/relationships" id="261" r:id="Rf8cc0d20f0b04b11"/>
+    <p:sldId xmlns:r="http://schemas.openxmlformats.org/officeDocument/2006/relationships" id="262" r:id="Rbcb31d9c26f540c8"/>
+    <p:sldId xmlns:r="http://schemas.openxmlformats.org/officeDocument/2006/relationships" id="263" r:id="Rb15eea8edd954006"/>
+    <p:sldId xmlns:r="http://schemas.openxmlformats.org/officeDocument/2006/relationships" id="264" r:id="Ra20b9d47f4804878"/>
+    <p:sldId xmlns:r="http://schemas.openxmlformats.org/officeDocument/2006/relationships" id="265" r:id="R0aad09471106447b"/>
+    <p:sldId xmlns:r="http://schemas.openxmlformats.org/officeDocument/2006/relationships" id="266" r:id="R5f4d50347a654248"/>
+    <p:sldId xmlns:r="http://schemas.openxmlformats.org/officeDocument/2006/relationships" id="267" r:id="R97bc9d0b4a4c4ef2"/>
   </p:sldIdLst>
   <p:sldSz cx="12192000" cy="6858000"/>
   <p:notesSz cx="6858000" cy="9144000"/>
@@ -873,7 +873,7 @@
           <a:lstStyle xmlns:a="http://schemas.openxmlformats.org/drawingml/2006/main"/>
           <a:p xmlns:a="http://schemas.openxmlformats.org/drawingml/2006/main">
             <a:r>
-              <a:t>I do. Reveal the question, setup and each calculation stage one click at a time. Pupils watch before copying. Model answer: 735,677.</a:t>
+              <a:t>I do. Reveal the question, then reveal each mathematical change one click at a time. Point to the numbers and operation that changed before moving to the next line. Final answer: 735,677.</a:t>
             </a:r>
           </a:p>
         </p:txBody>
@@ -1291,7 +1291,7 @@
   </p:cSld>
   <p:clrMap bg1="lt1" tx1="dk1" bg2="lt2" tx2="dk2" accent1="accent1" accent2="accent2" accent3="accent3" accent4="accent4" accent5="accent5" accent6="accent6" hlink="hlink" folHlink="folHlink"/>
   <p:sldLayoutIdLst>
-    <p:sldLayoutId xmlns:r="http://schemas.openxmlformats.org/officeDocument/2006/relationships" id="2147483649" r:id="R2a7ae8c26bdc4cc2"/>
+    <p:sldLayoutId xmlns:r="http://schemas.openxmlformats.org/officeDocument/2006/relationships" id="2147483649" r:id="R19b77d4cafea4dc5"/>
   </p:sldLayoutIdLst>
   <p:txStyles>
     <p:titleStyle>
@@ -1842,7 +1842,7 @@
           <p:cNvPr id="12" name="">
             <a:extLst xmlns:a="http://schemas.openxmlformats.org/drawingml/2006/main">
               <a:ext uri="{FF2B5EF4-FFF2-40B4-BE49-F238E27FC236}">
-                <a16:creationId xmlns:a16="http://schemas.microsoft.com/office/drawing/2014/main" id="{55726593-7CBB-4591-9281-4E5194C78F0C}"/>
+                <a16:creationId xmlns:a16="http://schemas.microsoft.com/office/drawing/2014/main" id="{09EE82D2-2AD4-438F-A715-AC10B618944D}"/>
               </a:ext>
             </a:extLst>
           </p:cNvPr>
@@ -1874,7 +1874,7 @@
           <p:cNvPr id="2" name="">
             <a:extLst xmlns:a="http://schemas.openxmlformats.org/drawingml/2006/main">
               <a:ext uri="{FF2B5EF4-FFF2-40B4-BE49-F238E27FC236}">
-                <a16:creationId xmlns:a16="http://schemas.microsoft.com/office/drawing/2014/main" id="{C513A630-91BF-4322-924E-183D839CF659}"/>
+                <a16:creationId xmlns:a16="http://schemas.microsoft.com/office/drawing/2014/main" id="{D88BA04B-421E-4125-823F-6CAFA2D8CA38}"/>
               </a:ext>
             </a:extLst>
           </p:cNvPr>
@@ -1931,7 +1931,7 @@
           <p:cNvPr id="3" name="">
             <a:extLst xmlns:a="http://schemas.openxmlformats.org/drawingml/2006/main">
               <a:ext uri="{FF2B5EF4-FFF2-40B4-BE49-F238E27FC236}">
-                <a16:creationId xmlns:a16="http://schemas.microsoft.com/office/drawing/2014/main" id="{18970D4A-1A6B-4002-A515-02BA33C67C5B}"/>
+                <a16:creationId xmlns:a16="http://schemas.microsoft.com/office/drawing/2014/main" id="{B4230CE2-76E2-413D-89DD-47A7CB47EC43}"/>
               </a:ext>
             </a:extLst>
           </p:cNvPr>
@@ -1965,7 +1965,7 @@
           <p:cNvPr id="4" name="">
             <a:extLst xmlns:a="http://schemas.openxmlformats.org/drawingml/2006/main">
               <a:ext uri="{FF2B5EF4-FFF2-40B4-BE49-F238E27FC236}">
-                <a16:creationId xmlns:a16="http://schemas.microsoft.com/office/drawing/2014/main" id="{F750F253-4A6B-41D5-98EE-428BADD3962D}"/>
+                <a16:creationId xmlns:a16="http://schemas.microsoft.com/office/drawing/2014/main" id="{1E771732-7263-4BF4-883A-3AA568EF5068}"/>
               </a:ext>
             </a:extLst>
           </p:cNvPr>
@@ -2022,7 +2022,7 @@
           <p:cNvPr id="5" name="">
             <a:extLst xmlns:a="http://schemas.openxmlformats.org/drawingml/2006/main">
               <a:ext uri="{FF2B5EF4-FFF2-40B4-BE49-F238E27FC236}">
-                <a16:creationId xmlns:a16="http://schemas.microsoft.com/office/drawing/2014/main" id="{29CB5A5F-758C-45E2-9CAD-A4509D942ADC}"/>
+                <a16:creationId xmlns:a16="http://schemas.microsoft.com/office/drawing/2014/main" id="{F39011E1-9B81-42AD-86C1-566D5D6A42EB}"/>
               </a:ext>
             </a:extLst>
           </p:cNvPr>
@@ -2079,7 +2079,7 @@
           <p:cNvPr id="6" name="">
             <a:extLst xmlns:a="http://schemas.openxmlformats.org/drawingml/2006/main">
               <a:ext uri="{FF2B5EF4-FFF2-40B4-BE49-F238E27FC236}">
-                <a16:creationId xmlns:a16="http://schemas.microsoft.com/office/drawing/2014/main" id="{92BEB59A-2CCC-43C7-A313-73C156CCE37C}"/>
+                <a16:creationId xmlns:a16="http://schemas.microsoft.com/office/drawing/2014/main" id="{5CC3F6E1-FAB8-4C11-AD26-142B6324040B}"/>
               </a:ext>
             </a:extLst>
           </p:cNvPr>
@@ -2113,7 +2113,7 @@
           <p:cNvPr id="7" name="">
             <a:extLst xmlns:a="http://schemas.openxmlformats.org/drawingml/2006/main">
               <a:ext uri="{FF2B5EF4-FFF2-40B4-BE49-F238E27FC236}">
-                <a16:creationId xmlns:a16="http://schemas.microsoft.com/office/drawing/2014/main" id="{8763984A-9D70-4DDC-A8E4-258CDE66CE69}"/>
+                <a16:creationId xmlns:a16="http://schemas.microsoft.com/office/drawing/2014/main" id="{F1F5A7A1-24AB-4E72-98CD-4D09E00835C8}"/>
               </a:ext>
             </a:extLst>
           </p:cNvPr>
@@ -2170,7 +2170,7 @@
           <p:cNvPr id="8" name="">
             <a:extLst xmlns:a="http://schemas.openxmlformats.org/drawingml/2006/main">
               <a:ext uri="{FF2B5EF4-FFF2-40B4-BE49-F238E27FC236}">
-                <a16:creationId xmlns:a16="http://schemas.microsoft.com/office/drawing/2014/main" id="{93EAF092-D025-49D3-947C-5557950CC972}"/>
+                <a16:creationId xmlns:a16="http://schemas.microsoft.com/office/drawing/2014/main" id="{F0536A8D-E3B0-4ED4-9F3D-B580060AA568}"/>
               </a:ext>
             </a:extLst>
           </p:cNvPr>
@@ -2227,7 +2227,7 @@
           <p:cNvPr id="9" name="">
             <a:extLst xmlns:a="http://schemas.openxmlformats.org/drawingml/2006/main">
               <a:ext uri="{FF2B5EF4-FFF2-40B4-BE49-F238E27FC236}">
-                <a16:creationId xmlns:a16="http://schemas.microsoft.com/office/drawing/2014/main" id="{A233FE41-CC06-440E-8DDC-65145B825532}"/>
+                <a16:creationId xmlns:a16="http://schemas.microsoft.com/office/drawing/2014/main" id="{51877DA3-154F-4828-93A3-C540BD1BC5C5}"/>
               </a:ext>
             </a:extLst>
           </p:cNvPr>
@@ -2284,7 +2284,7 @@
           <p:cNvPr id="10" name="">
             <a:extLst xmlns:a="http://schemas.openxmlformats.org/drawingml/2006/main">
               <a:ext uri="{FF2B5EF4-FFF2-40B4-BE49-F238E27FC236}">
-                <a16:creationId xmlns:a16="http://schemas.microsoft.com/office/drawing/2014/main" id="{4F984265-635B-47BF-B5F2-FF734B6D823B}"/>
+                <a16:creationId xmlns:a16="http://schemas.microsoft.com/office/drawing/2014/main" id="{CC51243D-E689-4F28-99EE-BD4ECD1CB814}"/>
               </a:ext>
             </a:extLst>
           </p:cNvPr>
@@ -2341,7 +2341,7 @@
           <p:cNvPr id="11" name="">
             <a:extLst xmlns:a="http://schemas.openxmlformats.org/drawingml/2006/main">
               <a:ext uri="{FF2B5EF4-FFF2-40B4-BE49-F238E27FC236}">
-                <a16:creationId xmlns:a16="http://schemas.microsoft.com/office/drawing/2014/main" id="{171F81BD-F78A-4A46-8579-A2EC5B77E8D1}"/>
+                <a16:creationId xmlns:a16="http://schemas.microsoft.com/office/drawing/2014/main" id="{69AF9D8B-B707-4886-BC76-A888EA195C7E}"/>
               </a:ext>
             </a:extLst>
           </p:cNvPr>
@@ -2396,7 +2396,7 @@
     </p:spTree>
     <p:extLst>
       <p:ext uri="{BB962C8B-B14F-4D97-AF65-F5344CB8AC3E}">
-        <p14:creationId xmlns:p14="http://schemas.microsoft.com/office/powerpoint/2010/main" val="1557964155"/>
+        <p14:creationId xmlns:p14="http://schemas.microsoft.com/office/powerpoint/2010/main" val="1508593402"/>
       </p:ext>
     </p:extLst>
   </p:cSld>
@@ -2427,7 +2427,7 @@
           <p:cNvPr id="14" name="">
             <a:extLst xmlns:a="http://schemas.openxmlformats.org/drawingml/2006/main">
               <a:ext uri="{FF2B5EF4-FFF2-40B4-BE49-F238E27FC236}">
-                <a16:creationId xmlns:a16="http://schemas.microsoft.com/office/drawing/2014/main" id="{77A13684-90C9-4BCC-A1C3-4B3F4FEC3E80}"/>
+                <a16:creationId xmlns:a16="http://schemas.microsoft.com/office/drawing/2014/main" id="{9223AC36-420B-43FE-BCC2-43AA8B062FFC}"/>
               </a:ext>
             </a:extLst>
           </p:cNvPr>
@@ -2459,7 +2459,7 @@
           <p:cNvPr id="2" name="">
             <a:extLst xmlns:a="http://schemas.openxmlformats.org/drawingml/2006/main">
               <a:ext uri="{FF2B5EF4-FFF2-40B4-BE49-F238E27FC236}">
-                <a16:creationId xmlns:a16="http://schemas.microsoft.com/office/drawing/2014/main" id="{C7AF9742-ADED-4DE4-B60A-193244C9290D}"/>
+                <a16:creationId xmlns:a16="http://schemas.microsoft.com/office/drawing/2014/main" id="{059138CA-9490-4A7D-B63C-52FF5F1642C0}"/>
               </a:ext>
             </a:extLst>
           </p:cNvPr>
@@ -2516,7 +2516,7 @@
           <p:cNvPr id="3" name="">
             <a:extLst xmlns:a="http://schemas.openxmlformats.org/drawingml/2006/main">
               <a:ext uri="{FF2B5EF4-FFF2-40B4-BE49-F238E27FC236}">
-                <a16:creationId xmlns:a16="http://schemas.microsoft.com/office/drawing/2014/main" id="{2E839020-987C-4261-B939-1AFE2437C5AF}"/>
+                <a16:creationId xmlns:a16="http://schemas.microsoft.com/office/drawing/2014/main" id="{76CF86A1-F2A4-4BF7-A710-4E74D7C555B9}"/>
               </a:ext>
             </a:extLst>
           </p:cNvPr>
@@ -2548,7 +2548,7 @@
           <p:cNvPr id="4" name="">
             <a:extLst xmlns:a="http://schemas.openxmlformats.org/drawingml/2006/main">
               <a:ext uri="{FF2B5EF4-FFF2-40B4-BE49-F238E27FC236}">
-                <a16:creationId xmlns:a16="http://schemas.microsoft.com/office/drawing/2014/main" id="{A64DADFC-5AF0-4CB8-B76A-6DFE53F65083}"/>
+                <a16:creationId xmlns:a16="http://schemas.microsoft.com/office/drawing/2014/main" id="{98044961-D80F-403E-9FDE-874F1F97EE42}"/>
               </a:ext>
             </a:extLst>
           </p:cNvPr>
@@ -2605,7 +2605,7 @@
           <p:cNvPr id="5" name="">
             <a:extLst xmlns:a="http://schemas.openxmlformats.org/drawingml/2006/main">
               <a:ext uri="{FF2B5EF4-FFF2-40B4-BE49-F238E27FC236}">
-                <a16:creationId xmlns:a16="http://schemas.microsoft.com/office/drawing/2014/main" id="{DD2C0629-F6D7-41E6-9564-3A7326587359}"/>
+                <a16:creationId xmlns:a16="http://schemas.microsoft.com/office/drawing/2014/main" id="{3F9513C0-A14B-41DA-A410-3520410A9417}"/>
               </a:ext>
             </a:extLst>
           </p:cNvPr>
@@ -2662,7 +2662,7 @@
           <p:cNvPr id="6" name="">
             <a:extLst xmlns:a="http://schemas.openxmlformats.org/drawingml/2006/main">
               <a:ext uri="{FF2B5EF4-FFF2-40B4-BE49-F238E27FC236}">
-                <a16:creationId xmlns:a16="http://schemas.microsoft.com/office/drawing/2014/main" id="{1703ED47-45A5-400E-A7AD-3E8F443754F6}"/>
+                <a16:creationId xmlns:a16="http://schemas.microsoft.com/office/drawing/2014/main" id="{4410916F-7E62-4F13-BA9D-A41238C3928B}"/>
               </a:ext>
             </a:extLst>
           </p:cNvPr>
@@ -2719,7 +2719,7 @@
           <p:cNvPr id="7" name="">
             <a:extLst xmlns:a="http://schemas.openxmlformats.org/drawingml/2006/main">
               <a:ext uri="{FF2B5EF4-FFF2-40B4-BE49-F238E27FC236}">
-                <a16:creationId xmlns:a16="http://schemas.microsoft.com/office/drawing/2014/main" id="{4C55BB96-D745-4F00-9773-CB0F1F4DF648}"/>
+                <a16:creationId xmlns:a16="http://schemas.microsoft.com/office/drawing/2014/main" id="{2C6E0DBA-EE27-4223-8CF2-FA40939855CD}"/>
               </a:ext>
             </a:extLst>
           </p:cNvPr>
@@ -2751,7 +2751,7 @@
           <p:cNvPr id="8" name="">
             <a:extLst xmlns:a="http://schemas.openxmlformats.org/drawingml/2006/main">
               <a:ext uri="{FF2B5EF4-FFF2-40B4-BE49-F238E27FC236}">
-                <a16:creationId xmlns:a16="http://schemas.microsoft.com/office/drawing/2014/main" id="{60334F4D-8DC9-4088-A581-FC70BACDA5CD}"/>
+                <a16:creationId xmlns:a16="http://schemas.microsoft.com/office/drawing/2014/main" id="{86D4AD96-98BB-404D-BBAF-120E792063A0}"/>
               </a:ext>
             </a:extLst>
           </p:cNvPr>
@@ -2808,7 +2808,7 @@
           <p:cNvPr id="9" name="">
             <a:extLst xmlns:a="http://schemas.openxmlformats.org/drawingml/2006/main">
               <a:ext uri="{FF2B5EF4-FFF2-40B4-BE49-F238E27FC236}">
-                <a16:creationId xmlns:a16="http://schemas.microsoft.com/office/drawing/2014/main" id="{C809821B-D423-4F4E-B318-391866578031}"/>
+                <a16:creationId xmlns:a16="http://schemas.microsoft.com/office/drawing/2014/main" id="{160AE48E-2DA5-4395-9BBF-3F3850477ED1}"/>
               </a:ext>
             </a:extLst>
           </p:cNvPr>
@@ -2865,7 +2865,7 @@
           <p:cNvPr id="10" name="">
             <a:extLst xmlns:a="http://schemas.openxmlformats.org/drawingml/2006/main">
               <a:ext uri="{FF2B5EF4-FFF2-40B4-BE49-F238E27FC236}">
-                <a16:creationId xmlns:a16="http://schemas.microsoft.com/office/drawing/2014/main" id="{00A3A0B0-E91D-42A9-84A2-57290C84C565}"/>
+                <a16:creationId xmlns:a16="http://schemas.microsoft.com/office/drawing/2014/main" id="{52BBA62A-70A6-4D6A-873E-E464508E76F7}"/>
               </a:ext>
             </a:extLst>
           </p:cNvPr>
@@ -2922,7 +2922,7 @@
           <p:cNvPr id="11" name="">
             <a:extLst xmlns:a="http://schemas.openxmlformats.org/drawingml/2006/main">
               <a:ext uri="{FF2B5EF4-FFF2-40B4-BE49-F238E27FC236}">
-                <a16:creationId xmlns:a16="http://schemas.microsoft.com/office/drawing/2014/main" id="{5B374F69-92BF-4A4C-8967-8189D795C155}"/>
+                <a16:creationId xmlns:a16="http://schemas.microsoft.com/office/drawing/2014/main" id="{510B5F6F-C14A-4367-B25F-817F31CB70DA}"/>
               </a:ext>
             </a:extLst>
           </p:cNvPr>
@@ -2979,7 +2979,7 @@
           <p:cNvPr id="12" name="">
             <a:extLst xmlns:a="http://schemas.openxmlformats.org/drawingml/2006/main">
               <a:ext uri="{FF2B5EF4-FFF2-40B4-BE49-F238E27FC236}">
-                <a16:creationId xmlns:a16="http://schemas.microsoft.com/office/drawing/2014/main" id="{44DC7933-A32B-4DB0-A388-4401FE50F9D6}"/>
+                <a16:creationId xmlns:a16="http://schemas.microsoft.com/office/drawing/2014/main" id="{1860824F-B210-4BCB-83D2-AB6A4C229C39}"/>
               </a:ext>
             </a:extLst>
           </p:cNvPr>
@@ -3036,7 +3036,7 @@
           <p:cNvPr id="13" name="">
             <a:extLst xmlns:a="http://schemas.openxmlformats.org/drawingml/2006/main">
               <a:ext uri="{FF2B5EF4-FFF2-40B4-BE49-F238E27FC236}">
-                <a16:creationId xmlns:a16="http://schemas.microsoft.com/office/drawing/2014/main" id="{C6FF191F-D609-45D8-A713-29534B189918}"/>
+                <a16:creationId xmlns:a16="http://schemas.microsoft.com/office/drawing/2014/main" id="{6A5F995A-1BE1-4AFC-AA69-68B146EAF680}"/>
               </a:ext>
             </a:extLst>
           </p:cNvPr>
@@ -3091,7 +3091,7 @@
     </p:spTree>
     <p:extLst>
       <p:ext uri="{BB962C8B-B14F-4D97-AF65-F5344CB8AC3E}">
-        <p14:creationId xmlns:p14="http://schemas.microsoft.com/office/powerpoint/2010/main" val="693178045"/>
+        <p14:creationId xmlns:p14="http://schemas.microsoft.com/office/powerpoint/2010/main" val="681110289"/>
       </p:ext>
     </p:extLst>
   </p:cSld>
@@ -3292,7 +3292,7 @@
           <p:cNvPr id="19" name="">
             <a:extLst xmlns:a="http://schemas.openxmlformats.org/drawingml/2006/main">
               <a:ext uri="{FF2B5EF4-FFF2-40B4-BE49-F238E27FC236}">
-                <a16:creationId xmlns:a16="http://schemas.microsoft.com/office/drawing/2014/main" id="{7152B2A4-56A1-4039-8950-6EB7083F04BC}"/>
+                <a16:creationId xmlns:a16="http://schemas.microsoft.com/office/drawing/2014/main" id="{A6913D39-7252-4919-B1DF-12AD97C43050}"/>
               </a:ext>
             </a:extLst>
           </p:cNvPr>
@@ -3324,7 +3324,7 @@
           <p:cNvPr id="2" name="">
             <a:extLst xmlns:a="http://schemas.openxmlformats.org/drawingml/2006/main">
               <a:ext uri="{FF2B5EF4-FFF2-40B4-BE49-F238E27FC236}">
-                <a16:creationId xmlns:a16="http://schemas.microsoft.com/office/drawing/2014/main" id="{4E2FE6EA-08B8-4F77-9896-2AFE8ECD9FCB}"/>
+                <a16:creationId xmlns:a16="http://schemas.microsoft.com/office/drawing/2014/main" id="{5E60EAAD-AC10-481A-9F52-49FAE9BAAA5B}"/>
               </a:ext>
             </a:extLst>
           </p:cNvPr>
@@ -3381,7 +3381,7 @@
           <p:cNvPr id="3" name="">
             <a:extLst xmlns:a="http://schemas.openxmlformats.org/drawingml/2006/main">
               <a:ext uri="{FF2B5EF4-FFF2-40B4-BE49-F238E27FC236}">
-                <a16:creationId xmlns:a16="http://schemas.microsoft.com/office/drawing/2014/main" id="{586A49CE-587E-4DC2-AF11-2CE3EE1D99E9}"/>
+                <a16:creationId xmlns:a16="http://schemas.microsoft.com/office/drawing/2014/main" id="{4CFA481B-405D-4A7A-B84F-ACC9D2A3FC4C}"/>
               </a:ext>
             </a:extLst>
           </p:cNvPr>
@@ -3413,7 +3413,7 @@
           <p:cNvPr id="4" name="">
             <a:extLst xmlns:a="http://schemas.openxmlformats.org/drawingml/2006/main">
               <a:ext uri="{FF2B5EF4-FFF2-40B4-BE49-F238E27FC236}">
-                <a16:creationId xmlns:a16="http://schemas.microsoft.com/office/drawing/2014/main" id="{BB778B78-AE76-496B-B6F7-D62E350C61F8}"/>
+                <a16:creationId xmlns:a16="http://schemas.microsoft.com/office/drawing/2014/main" id="{95E5E4F3-ED86-4D76-BF5A-EC93FD380AA9}"/>
               </a:ext>
             </a:extLst>
           </p:cNvPr>
@@ -3470,7 +3470,7 @@
           <p:cNvPr id="5" name="">
             <a:extLst xmlns:a="http://schemas.openxmlformats.org/drawingml/2006/main">
               <a:ext uri="{FF2B5EF4-FFF2-40B4-BE49-F238E27FC236}">
-                <a16:creationId xmlns:a16="http://schemas.microsoft.com/office/drawing/2014/main" id="{3025FE06-CA3C-4E42-9A04-F7D8EFE878D5}"/>
+                <a16:creationId xmlns:a16="http://schemas.microsoft.com/office/drawing/2014/main" id="{C851F8B7-5309-4518-BE0F-C93791ACB073}"/>
               </a:ext>
             </a:extLst>
           </p:cNvPr>
@@ -3527,7 +3527,7 @@
           <p:cNvPr id="6" name="">
             <a:extLst xmlns:a="http://schemas.openxmlformats.org/drawingml/2006/main">
               <a:ext uri="{FF2B5EF4-FFF2-40B4-BE49-F238E27FC236}">
-                <a16:creationId xmlns:a16="http://schemas.microsoft.com/office/drawing/2014/main" id="{253B8BB2-AA96-4D31-8D27-52BD8DE8EF75}"/>
+                <a16:creationId xmlns:a16="http://schemas.microsoft.com/office/drawing/2014/main" id="{4FB3E410-B8C7-4EC4-A1D2-E63DBA0C0102}"/>
               </a:ext>
             </a:extLst>
           </p:cNvPr>
@@ -3584,7 +3584,7 @@
           <p:cNvPr id="7" name="">
             <a:extLst xmlns:a="http://schemas.openxmlformats.org/drawingml/2006/main">
               <a:ext uri="{FF2B5EF4-FFF2-40B4-BE49-F238E27FC236}">
-                <a16:creationId xmlns:a16="http://schemas.microsoft.com/office/drawing/2014/main" id="{5B6CDEB6-43AB-4387-827D-0FC244172CC6}"/>
+                <a16:creationId xmlns:a16="http://schemas.microsoft.com/office/drawing/2014/main" id="{09DD95CF-5888-49D8-8845-EB1F440566A1}"/>
               </a:ext>
             </a:extLst>
           </p:cNvPr>
@@ -3616,7 +3616,7 @@
           <p:cNvPr id="8" name="">
             <a:extLst xmlns:a="http://schemas.openxmlformats.org/drawingml/2006/main">
               <a:ext uri="{FF2B5EF4-FFF2-40B4-BE49-F238E27FC236}">
-                <a16:creationId xmlns:a16="http://schemas.microsoft.com/office/drawing/2014/main" id="{2F396F4C-FBDE-4C5A-B603-6BCAEEC79B10}"/>
+                <a16:creationId xmlns:a16="http://schemas.microsoft.com/office/drawing/2014/main" id="{33556F25-8768-48A5-838F-B263A399B353}"/>
               </a:ext>
             </a:extLst>
           </p:cNvPr>
@@ -3673,7 +3673,7 @@
           <p:cNvPr id="9" name="">
             <a:extLst xmlns:a="http://schemas.openxmlformats.org/drawingml/2006/main">
               <a:ext uri="{FF2B5EF4-FFF2-40B4-BE49-F238E27FC236}">
-                <a16:creationId xmlns:a16="http://schemas.microsoft.com/office/drawing/2014/main" id="{55027B62-1405-48C5-8538-4C7203262704}"/>
+                <a16:creationId xmlns:a16="http://schemas.microsoft.com/office/drawing/2014/main" id="{D71A3FB2-A62F-4C30-9794-6072C923CE75}"/>
               </a:ext>
             </a:extLst>
           </p:cNvPr>
@@ -3730,7 +3730,7 @@
           <p:cNvPr id="10" name="">
             <a:extLst xmlns:a="http://schemas.openxmlformats.org/drawingml/2006/main">
               <a:ext uri="{FF2B5EF4-FFF2-40B4-BE49-F238E27FC236}">
-                <a16:creationId xmlns:a16="http://schemas.microsoft.com/office/drawing/2014/main" id="{BDCD27BF-DD35-4190-844D-5B106EBF8700}"/>
+                <a16:creationId xmlns:a16="http://schemas.microsoft.com/office/drawing/2014/main" id="{319B595C-2FA3-4088-9BEF-14A494224BBF}"/>
               </a:ext>
             </a:extLst>
           </p:cNvPr>
@@ -3787,7 +3787,7 @@
           <p:cNvPr id="11" name="">
             <a:extLst xmlns:a="http://schemas.openxmlformats.org/drawingml/2006/main">
               <a:ext uri="{FF2B5EF4-FFF2-40B4-BE49-F238E27FC236}">
-                <a16:creationId xmlns:a16="http://schemas.microsoft.com/office/drawing/2014/main" id="{EEB98C64-BF25-468A-B0BE-2A8EA51B2E7A}"/>
+                <a16:creationId xmlns:a16="http://schemas.microsoft.com/office/drawing/2014/main" id="{7007C595-DF4C-4FE4-894A-3A77D15D78B9}"/>
               </a:ext>
             </a:extLst>
           </p:cNvPr>
@@ -3821,7 +3821,7 @@
           <p:cNvPr id="12" name="">
             <a:extLst xmlns:a="http://schemas.openxmlformats.org/drawingml/2006/main">
               <a:ext uri="{FF2B5EF4-FFF2-40B4-BE49-F238E27FC236}">
-                <a16:creationId xmlns:a16="http://schemas.microsoft.com/office/drawing/2014/main" id="{F05CC24F-4CB6-49F3-ABE0-4F189C6B939F}"/>
+                <a16:creationId xmlns:a16="http://schemas.microsoft.com/office/drawing/2014/main" id="{F58CA8A3-8B24-47A8-84E7-8C85032B5B0D}"/>
               </a:ext>
             </a:extLst>
           </p:cNvPr>
@@ -3878,7 +3878,7 @@
           <p:cNvPr id="13" name="">
             <a:extLst xmlns:a="http://schemas.openxmlformats.org/drawingml/2006/main">
               <a:ext uri="{FF2B5EF4-FFF2-40B4-BE49-F238E27FC236}">
-                <a16:creationId xmlns:a16="http://schemas.microsoft.com/office/drawing/2014/main" id="{F089AC1A-E1AF-4E1E-B4F9-40F2644DD1A8}"/>
+                <a16:creationId xmlns:a16="http://schemas.microsoft.com/office/drawing/2014/main" id="{CA800F76-9985-42E3-B5E3-645266ADE654}"/>
               </a:ext>
             </a:extLst>
           </p:cNvPr>
@@ -3935,7 +3935,7 @@
           <p:cNvPr id="14" name="">
             <a:extLst xmlns:a="http://schemas.openxmlformats.org/drawingml/2006/main">
               <a:ext uri="{FF2B5EF4-FFF2-40B4-BE49-F238E27FC236}">
-                <a16:creationId xmlns:a16="http://schemas.microsoft.com/office/drawing/2014/main" id="{F81DBFF3-DF70-4C85-9A00-E9C6CB3E7F38}"/>
+                <a16:creationId xmlns:a16="http://schemas.microsoft.com/office/drawing/2014/main" id="{B429A373-CD92-457F-8B24-E3480EB064BC}"/>
               </a:ext>
             </a:extLst>
           </p:cNvPr>
@@ -3992,7 +3992,7 @@
           <p:cNvPr id="15" name="">
             <a:extLst xmlns:a="http://schemas.openxmlformats.org/drawingml/2006/main">
               <a:ext uri="{FF2B5EF4-FFF2-40B4-BE49-F238E27FC236}">
-                <a16:creationId xmlns:a16="http://schemas.microsoft.com/office/drawing/2014/main" id="{6F03860E-449C-4F3B-A05D-AEC0A51317CA}"/>
+                <a16:creationId xmlns:a16="http://schemas.microsoft.com/office/drawing/2014/main" id="{1B055E66-17A6-44F8-93DB-69A681210776}"/>
               </a:ext>
             </a:extLst>
           </p:cNvPr>
@@ -4026,7 +4026,7 @@
           <p:cNvPr id="16" name="">
             <a:extLst xmlns:a="http://schemas.openxmlformats.org/drawingml/2006/main">
               <a:ext uri="{FF2B5EF4-FFF2-40B4-BE49-F238E27FC236}">
-                <a16:creationId xmlns:a16="http://schemas.microsoft.com/office/drawing/2014/main" id="{8462F287-DEA6-43E0-B649-42C8924CD4E2}"/>
+                <a16:creationId xmlns:a16="http://schemas.microsoft.com/office/drawing/2014/main" id="{48F2CC38-9AD2-4C1C-9418-D7B7260B3EC8}"/>
               </a:ext>
             </a:extLst>
           </p:cNvPr>
@@ -4083,7 +4083,7 @@
           <p:cNvPr id="17" name="">
             <a:extLst xmlns:a="http://schemas.openxmlformats.org/drawingml/2006/main">
               <a:ext uri="{FF2B5EF4-FFF2-40B4-BE49-F238E27FC236}">
-                <a16:creationId xmlns:a16="http://schemas.microsoft.com/office/drawing/2014/main" id="{F4DE6D14-3491-4578-88E0-8B91749843D6}"/>
+                <a16:creationId xmlns:a16="http://schemas.microsoft.com/office/drawing/2014/main" id="{88FDBCAF-A745-4D62-A8D5-E6F79D9DEACA}"/>
               </a:ext>
             </a:extLst>
           </p:cNvPr>
@@ -4140,7 +4140,7 @@
           <p:cNvPr id="18" name="">
             <a:extLst xmlns:a="http://schemas.openxmlformats.org/drawingml/2006/main">
               <a:ext uri="{FF2B5EF4-FFF2-40B4-BE49-F238E27FC236}">
-                <a16:creationId xmlns:a16="http://schemas.microsoft.com/office/drawing/2014/main" id="{A5674569-CE6D-4805-81CE-5A704123A455}"/>
+                <a16:creationId xmlns:a16="http://schemas.microsoft.com/office/drawing/2014/main" id="{BD35888A-11C8-47C8-8F40-28D390761355}"/>
               </a:ext>
             </a:extLst>
           </p:cNvPr>
@@ -4195,7 +4195,7 @@
     </p:spTree>
     <p:extLst>
       <p:ext uri="{BB962C8B-B14F-4D97-AF65-F5344CB8AC3E}">
-        <p14:creationId xmlns:p14="http://schemas.microsoft.com/office/powerpoint/2010/main" val="705290097"/>
+        <p14:creationId xmlns:p14="http://schemas.microsoft.com/office/powerpoint/2010/main" val="1149585217"/>
       </p:ext>
     </p:extLst>
   </p:cSld>
@@ -4350,7 +4350,7 @@
           <p:cNvPr id="23" name="">
             <a:extLst xmlns:a="http://schemas.openxmlformats.org/drawingml/2006/main">
               <a:ext uri="{FF2B5EF4-FFF2-40B4-BE49-F238E27FC236}">
-                <a16:creationId xmlns:a16="http://schemas.microsoft.com/office/drawing/2014/main" id="{3CB498EC-9AF8-4042-A2C1-E9C20C5089D7}"/>
+                <a16:creationId xmlns:a16="http://schemas.microsoft.com/office/drawing/2014/main" id="{A7571F99-499D-4F61-A913-527CC9D862B2}"/>
               </a:ext>
             </a:extLst>
           </p:cNvPr>
@@ -4382,7 +4382,7 @@
           <p:cNvPr id="2" name="">
             <a:extLst xmlns:a="http://schemas.openxmlformats.org/drawingml/2006/main">
               <a:ext uri="{FF2B5EF4-FFF2-40B4-BE49-F238E27FC236}">
-                <a16:creationId xmlns:a16="http://schemas.microsoft.com/office/drawing/2014/main" id="{C43ACD89-893C-4028-8514-D037980AA9D8}"/>
+                <a16:creationId xmlns:a16="http://schemas.microsoft.com/office/drawing/2014/main" id="{AF04E1EE-12D5-44A3-A106-9FCA71B8E81C}"/>
               </a:ext>
             </a:extLst>
           </p:cNvPr>
@@ -4439,7 +4439,7 @@
           <p:cNvPr id="3" name="">
             <a:extLst xmlns:a="http://schemas.openxmlformats.org/drawingml/2006/main">
               <a:ext uri="{FF2B5EF4-FFF2-40B4-BE49-F238E27FC236}">
-                <a16:creationId xmlns:a16="http://schemas.microsoft.com/office/drawing/2014/main" id="{EA032108-B883-40CE-8073-F90C1F8B6916}"/>
+                <a16:creationId xmlns:a16="http://schemas.microsoft.com/office/drawing/2014/main" id="{E94150CD-338D-4C86-826F-D08F0DA117FA}"/>
               </a:ext>
             </a:extLst>
           </p:cNvPr>
@@ -4471,7 +4471,7 @@
           <p:cNvPr id="4" name="">
             <a:extLst xmlns:a="http://schemas.openxmlformats.org/drawingml/2006/main">
               <a:ext uri="{FF2B5EF4-FFF2-40B4-BE49-F238E27FC236}">
-                <a16:creationId xmlns:a16="http://schemas.microsoft.com/office/drawing/2014/main" id="{02743391-058C-41FF-8F2D-18256A3FC47E}"/>
+                <a16:creationId xmlns:a16="http://schemas.microsoft.com/office/drawing/2014/main" id="{01678AAF-B956-45A7-9FB9-953E8D7FDF65}"/>
               </a:ext>
             </a:extLst>
           </p:cNvPr>
@@ -4528,7 +4528,7 @@
           <p:cNvPr id="5" name="">
             <a:extLst xmlns:a="http://schemas.openxmlformats.org/drawingml/2006/main">
               <a:ext uri="{FF2B5EF4-FFF2-40B4-BE49-F238E27FC236}">
-                <a16:creationId xmlns:a16="http://schemas.microsoft.com/office/drawing/2014/main" id="{E8F37180-DE08-4299-A0D0-8EE4C22A2406}"/>
+                <a16:creationId xmlns:a16="http://schemas.microsoft.com/office/drawing/2014/main" id="{208E7123-0A35-4F57-8D0C-DC65867BFE0D}"/>
               </a:ext>
             </a:extLst>
           </p:cNvPr>
@@ -4585,7 +4585,7 @@
           <p:cNvPr id="6" name="">
             <a:extLst xmlns:a="http://schemas.openxmlformats.org/drawingml/2006/main">
               <a:ext uri="{FF2B5EF4-FFF2-40B4-BE49-F238E27FC236}">
-                <a16:creationId xmlns:a16="http://schemas.microsoft.com/office/drawing/2014/main" id="{5811F496-7A2E-47E8-B45B-A293DB1690A9}"/>
+                <a16:creationId xmlns:a16="http://schemas.microsoft.com/office/drawing/2014/main" id="{763F3F1B-D351-4724-A091-3F0F05CB95B0}"/>
               </a:ext>
             </a:extLst>
           </p:cNvPr>
@@ -4642,7 +4642,7 @@
           <p:cNvPr id="7" name="">
             <a:extLst xmlns:a="http://schemas.openxmlformats.org/drawingml/2006/main">
               <a:ext uri="{FF2B5EF4-FFF2-40B4-BE49-F238E27FC236}">
-                <a16:creationId xmlns:a16="http://schemas.microsoft.com/office/drawing/2014/main" id="{4BF09A49-0836-4932-A624-12CCA236251E}"/>
+                <a16:creationId xmlns:a16="http://schemas.microsoft.com/office/drawing/2014/main" id="{751F568D-6BAC-475E-82EE-446BD3BB081E}"/>
               </a:ext>
             </a:extLst>
           </p:cNvPr>
@@ -4674,7 +4674,7 @@
           <p:cNvPr id="8" name="">
             <a:extLst xmlns:a="http://schemas.openxmlformats.org/drawingml/2006/main">
               <a:ext uri="{FF2B5EF4-FFF2-40B4-BE49-F238E27FC236}">
-                <a16:creationId xmlns:a16="http://schemas.microsoft.com/office/drawing/2014/main" id="{B69E52D6-BCDF-4D3F-B0A3-BC430BEAEBE8}"/>
+                <a16:creationId xmlns:a16="http://schemas.microsoft.com/office/drawing/2014/main" id="{8C34C8F9-1731-4375-852A-291BBAE55BED}"/>
               </a:ext>
             </a:extLst>
           </p:cNvPr>
@@ -4731,7 +4731,7 @@
           <p:cNvPr id="9" name="">
             <a:extLst xmlns:a="http://schemas.openxmlformats.org/drawingml/2006/main">
               <a:ext uri="{FF2B5EF4-FFF2-40B4-BE49-F238E27FC236}">
-                <a16:creationId xmlns:a16="http://schemas.microsoft.com/office/drawing/2014/main" id="{FF1C3E2F-D798-4C18-9947-2F80F474E37E}"/>
+                <a16:creationId xmlns:a16="http://schemas.microsoft.com/office/drawing/2014/main" id="{333A93AD-96DA-4CB2-A0D2-52C46C4DAA85}"/>
               </a:ext>
             </a:extLst>
           </p:cNvPr>
@@ -4788,7 +4788,7 @@
           <p:cNvPr id="10" name="">
             <a:extLst xmlns:a="http://schemas.openxmlformats.org/drawingml/2006/main">
               <a:ext uri="{FF2B5EF4-FFF2-40B4-BE49-F238E27FC236}">
-                <a16:creationId xmlns:a16="http://schemas.microsoft.com/office/drawing/2014/main" id="{A3E9241D-92FD-4348-B969-E74923C75B88}"/>
+                <a16:creationId xmlns:a16="http://schemas.microsoft.com/office/drawing/2014/main" id="{8BE11DB3-40BC-4266-8E75-4E364AC5F89B}"/>
               </a:ext>
             </a:extLst>
           </p:cNvPr>
@@ -4822,7 +4822,7 @@
           <p:cNvPr id="11" name="">
             <a:extLst xmlns:a="http://schemas.openxmlformats.org/drawingml/2006/main">
               <a:ext uri="{FF2B5EF4-FFF2-40B4-BE49-F238E27FC236}">
-                <a16:creationId xmlns:a16="http://schemas.microsoft.com/office/drawing/2014/main" id="{E3DCA0B5-A2A6-4ADF-B1F9-2F63895EF401}"/>
+                <a16:creationId xmlns:a16="http://schemas.microsoft.com/office/drawing/2014/main" id="{68230C4A-9BCD-48AD-8A14-B75419C46B0D}"/>
               </a:ext>
             </a:extLst>
           </p:cNvPr>
@@ -4854,7 +4854,7 @@
           <p:cNvPr id="12" name="">
             <a:extLst xmlns:a="http://schemas.openxmlformats.org/drawingml/2006/main">
               <a:ext uri="{FF2B5EF4-FFF2-40B4-BE49-F238E27FC236}">
-                <a16:creationId xmlns:a16="http://schemas.microsoft.com/office/drawing/2014/main" id="{7E2AFC07-CC34-42D6-8616-DA03751306B1}"/>
+                <a16:creationId xmlns:a16="http://schemas.microsoft.com/office/drawing/2014/main" id="{D13C1CDA-3DD2-4193-BD1A-149A1DB453A8}"/>
               </a:ext>
             </a:extLst>
           </p:cNvPr>
@@ -4911,7 +4911,7 @@
           <p:cNvPr id="13" name="">
             <a:extLst xmlns:a="http://schemas.openxmlformats.org/drawingml/2006/main">
               <a:ext uri="{FF2B5EF4-FFF2-40B4-BE49-F238E27FC236}">
-                <a16:creationId xmlns:a16="http://schemas.microsoft.com/office/drawing/2014/main" id="{127A0AA2-36F6-44CF-B9C4-717355E80AE9}"/>
+                <a16:creationId xmlns:a16="http://schemas.microsoft.com/office/drawing/2014/main" id="{452DD757-7312-44A0-9F95-830317727C8D}"/>
               </a:ext>
             </a:extLst>
           </p:cNvPr>
@@ -4968,7 +4968,7 @@
           <p:cNvPr id="14" name="">
             <a:extLst xmlns:a="http://schemas.openxmlformats.org/drawingml/2006/main">
               <a:ext uri="{FF2B5EF4-FFF2-40B4-BE49-F238E27FC236}">
-                <a16:creationId xmlns:a16="http://schemas.microsoft.com/office/drawing/2014/main" id="{685A7E5A-E12C-4CE6-AC06-89DEB4E8A5D3}"/>
+                <a16:creationId xmlns:a16="http://schemas.microsoft.com/office/drawing/2014/main" id="{72637200-43B0-4E21-8DF0-F3E35B0149A3}"/>
               </a:ext>
             </a:extLst>
           </p:cNvPr>
@@ -5002,7 +5002,7 @@
           <p:cNvPr id="15" name="">
             <a:extLst xmlns:a="http://schemas.openxmlformats.org/drawingml/2006/main">
               <a:ext uri="{FF2B5EF4-FFF2-40B4-BE49-F238E27FC236}">
-                <a16:creationId xmlns:a16="http://schemas.microsoft.com/office/drawing/2014/main" id="{223CB349-F032-42DE-9CCE-D33323AF7AF8}"/>
+                <a16:creationId xmlns:a16="http://schemas.microsoft.com/office/drawing/2014/main" id="{7BFA9450-415D-4C2C-976C-342A885EF501}"/>
               </a:ext>
             </a:extLst>
           </p:cNvPr>
@@ -5034,7 +5034,7 @@
           <p:cNvPr id="16" name="">
             <a:extLst xmlns:a="http://schemas.openxmlformats.org/drawingml/2006/main">
               <a:ext uri="{FF2B5EF4-FFF2-40B4-BE49-F238E27FC236}">
-                <a16:creationId xmlns:a16="http://schemas.microsoft.com/office/drawing/2014/main" id="{57F6903D-D5ED-46A1-8B9E-1042D6530757}"/>
+                <a16:creationId xmlns:a16="http://schemas.microsoft.com/office/drawing/2014/main" id="{10B9BBAA-C1A7-4150-BA12-8273487AC573}"/>
               </a:ext>
             </a:extLst>
           </p:cNvPr>
@@ -5091,7 +5091,7 @@
           <p:cNvPr id="17" name="">
             <a:extLst xmlns:a="http://schemas.openxmlformats.org/drawingml/2006/main">
               <a:ext uri="{FF2B5EF4-FFF2-40B4-BE49-F238E27FC236}">
-                <a16:creationId xmlns:a16="http://schemas.microsoft.com/office/drawing/2014/main" id="{0097759E-3445-4A1E-B59D-D7CE659ED105}"/>
+                <a16:creationId xmlns:a16="http://schemas.microsoft.com/office/drawing/2014/main" id="{E007D6CB-EC09-4031-801F-44F4CC91C344}"/>
               </a:ext>
             </a:extLst>
           </p:cNvPr>
@@ -5148,7 +5148,7 @@
           <p:cNvPr id="18" name="">
             <a:extLst xmlns:a="http://schemas.openxmlformats.org/drawingml/2006/main">
               <a:ext uri="{FF2B5EF4-FFF2-40B4-BE49-F238E27FC236}">
-                <a16:creationId xmlns:a16="http://schemas.microsoft.com/office/drawing/2014/main" id="{3490788F-6F66-4958-8026-1E8DCADBA631}"/>
+                <a16:creationId xmlns:a16="http://schemas.microsoft.com/office/drawing/2014/main" id="{23195539-1A91-4849-B51D-42F522587D92}"/>
               </a:ext>
             </a:extLst>
           </p:cNvPr>
@@ -5182,7 +5182,7 @@
           <p:cNvPr id="19" name="">
             <a:extLst xmlns:a="http://schemas.openxmlformats.org/drawingml/2006/main">
               <a:ext uri="{FF2B5EF4-FFF2-40B4-BE49-F238E27FC236}">
-                <a16:creationId xmlns:a16="http://schemas.microsoft.com/office/drawing/2014/main" id="{6723B6CF-13AE-4455-970C-CB4A39892FF4}"/>
+                <a16:creationId xmlns:a16="http://schemas.microsoft.com/office/drawing/2014/main" id="{196117F6-7C44-4D1C-84FF-1081D48B850A}"/>
               </a:ext>
             </a:extLst>
           </p:cNvPr>
@@ -5214,7 +5214,7 @@
           <p:cNvPr id="20" name="">
             <a:extLst xmlns:a="http://schemas.openxmlformats.org/drawingml/2006/main">
               <a:ext uri="{FF2B5EF4-FFF2-40B4-BE49-F238E27FC236}">
-                <a16:creationId xmlns:a16="http://schemas.microsoft.com/office/drawing/2014/main" id="{D6BD5827-D5E2-4008-AE80-5A96B984FC73}"/>
+                <a16:creationId xmlns:a16="http://schemas.microsoft.com/office/drawing/2014/main" id="{9BDBD65F-B2B8-4B5A-9274-D694AFBFCEC9}"/>
               </a:ext>
             </a:extLst>
           </p:cNvPr>
@@ -5271,7 +5271,7 @@
           <p:cNvPr id="21" name="">
             <a:extLst xmlns:a="http://schemas.openxmlformats.org/drawingml/2006/main">
               <a:ext uri="{FF2B5EF4-FFF2-40B4-BE49-F238E27FC236}">
-                <a16:creationId xmlns:a16="http://schemas.microsoft.com/office/drawing/2014/main" id="{C186083A-9DBD-4E7B-9192-2B3765688A92}"/>
+                <a16:creationId xmlns:a16="http://schemas.microsoft.com/office/drawing/2014/main" id="{C253C858-BCF3-4206-BFBE-50663E5669EE}"/>
               </a:ext>
             </a:extLst>
           </p:cNvPr>
@@ -5328,7 +5328,7 @@
           <p:cNvPr id="22" name="">
             <a:extLst xmlns:a="http://schemas.openxmlformats.org/drawingml/2006/main">
               <a:ext uri="{FF2B5EF4-FFF2-40B4-BE49-F238E27FC236}">
-                <a16:creationId xmlns:a16="http://schemas.microsoft.com/office/drawing/2014/main" id="{94CD5917-A1A6-4A83-960C-E3D518846CDF}"/>
+                <a16:creationId xmlns:a16="http://schemas.microsoft.com/office/drawing/2014/main" id="{AF130AB7-2446-40F4-BEAA-E4932E45F5A7}"/>
               </a:ext>
             </a:extLst>
           </p:cNvPr>
@@ -5383,7 +5383,7 @@
     </p:spTree>
     <p:extLst>
       <p:ext uri="{BB962C8B-B14F-4D97-AF65-F5344CB8AC3E}">
-        <p14:creationId xmlns:p14="http://schemas.microsoft.com/office/powerpoint/2010/main" val="552596807"/>
+        <p14:creationId xmlns:p14="http://schemas.microsoft.com/office/powerpoint/2010/main" val="1725723156"/>
       </p:ext>
     </p:extLst>
   </p:cSld>
@@ -5584,7 +5584,7 @@
           <p:cNvPr id="23" name="">
             <a:extLst xmlns:a="http://schemas.openxmlformats.org/drawingml/2006/main">
               <a:ext uri="{FF2B5EF4-FFF2-40B4-BE49-F238E27FC236}">
-                <a16:creationId xmlns:a16="http://schemas.microsoft.com/office/drawing/2014/main" id="{C6B76DC3-0C4A-4BC3-9AD9-CC8925E0701D}"/>
+                <a16:creationId xmlns:a16="http://schemas.microsoft.com/office/drawing/2014/main" id="{88AEDC30-D89D-42F0-9B87-3B1E6FAD29E3}"/>
               </a:ext>
             </a:extLst>
           </p:cNvPr>
@@ -5616,7 +5616,7 @@
           <p:cNvPr id="2" name="">
             <a:extLst xmlns:a="http://schemas.openxmlformats.org/drawingml/2006/main">
               <a:ext uri="{FF2B5EF4-FFF2-40B4-BE49-F238E27FC236}">
-                <a16:creationId xmlns:a16="http://schemas.microsoft.com/office/drawing/2014/main" id="{C065ED35-42EE-4563-AD58-E663356566FB}"/>
+                <a16:creationId xmlns:a16="http://schemas.microsoft.com/office/drawing/2014/main" id="{5FE423A2-2B07-4814-A330-3A1AE5F96900}"/>
               </a:ext>
             </a:extLst>
           </p:cNvPr>
@@ -5673,7 +5673,7 @@
           <p:cNvPr id="3" name="">
             <a:extLst xmlns:a="http://schemas.openxmlformats.org/drawingml/2006/main">
               <a:ext uri="{FF2B5EF4-FFF2-40B4-BE49-F238E27FC236}">
-                <a16:creationId xmlns:a16="http://schemas.microsoft.com/office/drawing/2014/main" id="{998799C2-37A4-49EA-AEC9-8290E72EA619}"/>
+                <a16:creationId xmlns:a16="http://schemas.microsoft.com/office/drawing/2014/main" id="{9A5E1B23-F128-4270-AE39-FE6DFC2169F7}"/>
               </a:ext>
             </a:extLst>
           </p:cNvPr>
@@ -5705,7 +5705,7 @@
           <p:cNvPr id="4" name="">
             <a:extLst xmlns:a="http://schemas.openxmlformats.org/drawingml/2006/main">
               <a:ext uri="{FF2B5EF4-FFF2-40B4-BE49-F238E27FC236}">
-                <a16:creationId xmlns:a16="http://schemas.microsoft.com/office/drawing/2014/main" id="{D8AD97A1-BBA1-4D83-A3B0-05C7200F2BD0}"/>
+                <a16:creationId xmlns:a16="http://schemas.microsoft.com/office/drawing/2014/main" id="{A818857B-D342-4F56-838F-F167FDC94B50}"/>
               </a:ext>
             </a:extLst>
           </p:cNvPr>
@@ -5762,7 +5762,7 @@
           <p:cNvPr id="5" name="">
             <a:extLst xmlns:a="http://schemas.openxmlformats.org/drawingml/2006/main">
               <a:ext uri="{FF2B5EF4-FFF2-40B4-BE49-F238E27FC236}">
-                <a16:creationId xmlns:a16="http://schemas.microsoft.com/office/drawing/2014/main" id="{06398647-6B92-47F2-90C8-C300B92C5E7C}"/>
+                <a16:creationId xmlns:a16="http://schemas.microsoft.com/office/drawing/2014/main" id="{16E96F20-494C-46D0-A074-6E4B915D1E77}"/>
               </a:ext>
             </a:extLst>
           </p:cNvPr>
@@ -5819,7 +5819,7 @@
           <p:cNvPr id="6" name="">
             <a:extLst xmlns:a="http://schemas.openxmlformats.org/drawingml/2006/main">
               <a:ext uri="{FF2B5EF4-FFF2-40B4-BE49-F238E27FC236}">
-                <a16:creationId xmlns:a16="http://schemas.microsoft.com/office/drawing/2014/main" id="{356B551B-C180-4375-8677-BD0A163F4F3E}"/>
+                <a16:creationId xmlns:a16="http://schemas.microsoft.com/office/drawing/2014/main" id="{7683938B-F5D9-4D7E-AAC6-184D9AC9B15A}"/>
               </a:ext>
             </a:extLst>
           </p:cNvPr>
@@ -5876,7 +5876,7 @@
           <p:cNvPr id="7" name="">
             <a:extLst xmlns:a="http://schemas.openxmlformats.org/drawingml/2006/main">
               <a:ext uri="{FF2B5EF4-FFF2-40B4-BE49-F238E27FC236}">
-                <a16:creationId xmlns:a16="http://schemas.microsoft.com/office/drawing/2014/main" id="{052A73A7-85F2-4850-B94D-50FAF7CF1320}"/>
+                <a16:creationId xmlns:a16="http://schemas.microsoft.com/office/drawing/2014/main" id="{FFA385C3-A03D-4F9F-AFDC-E87E5AE1ACEB}"/>
               </a:ext>
             </a:extLst>
           </p:cNvPr>
@@ -5908,7 +5908,7 @@
           <p:cNvPr id="8" name="">
             <a:extLst xmlns:a="http://schemas.openxmlformats.org/drawingml/2006/main">
               <a:ext uri="{FF2B5EF4-FFF2-40B4-BE49-F238E27FC236}">
-                <a16:creationId xmlns:a16="http://schemas.microsoft.com/office/drawing/2014/main" id="{893F4158-9152-4B66-9D55-35E5A7DE1E98}"/>
+                <a16:creationId xmlns:a16="http://schemas.microsoft.com/office/drawing/2014/main" id="{E82A4292-5AB9-4CF3-9C9C-B156FBF2D9F5}"/>
               </a:ext>
             </a:extLst>
           </p:cNvPr>
@@ -5965,7 +5965,7 @@
           <p:cNvPr id="9" name="">
             <a:extLst xmlns:a="http://schemas.openxmlformats.org/drawingml/2006/main">
               <a:ext uri="{FF2B5EF4-FFF2-40B4-BE49-F238E27FC236}">
-                <a16:creationId xmlns:a16="http://schemas.microsoft.com/office/drawing/2014/main" id="{69992DA5-F665-4D76-B6B7-33101E78C884}"/>
+                <a16:creationId xmlns:a16="http://schemas.microsoft.com/office/drawing/2014/main" id="{AAE0668E-B033-4F95-A499-08AC0C7241A3}"/>
               </a:ext>
             </a:extLst>
           </p:cNvPr>
@@ -6022,7 +6022,7 @@
           <p:cNvPr id="10" name="">
             <a:extLst xmlns:a="http://schemas.openxmlformats.org/drawingml/2006/main">
               <a:ext uri="{FF2B5EF4-FFF2-40B4-BE49-F238E27FC236}">
-                <a16:creationId xmlns:a16="http://schemas.microsoft.com/office/drawing/2014/main" id="{0ADAA10C-FC0D-4170-BD32-0F3ABACC11DA}"/>
+                <a16:creationId xmlns:a16="http://schemas.microsoft.com/office/drawing/2014/main" id="{7F06022A-E160-455B-A432-5CD6D115AC3C}"/>
               </a:ext>
             </a:extLst>
           </p:cNvPr>
@@ -6056,7 +6056,7 @@
           <p:cNvPr id="11" name="">
             <a:extLst xmlns:a="http://schemas.openxmlformats.org/drawingml/2006/main">
               <a:ext uri="{FF2B5EF4-FFF2-40B4-BE49-F238E27FC236}">
-                <a16:creationId xmlns:a16="http://schemas.microsoft.com/office/drawing/2014/main" id="{59A4C7F6-EE34-4615-B5A2-C9121775C665}"/>
+                <a16:creationId xmlns:a16="http://schemas.microsoft.com/office/drawing/2014/main" id="{ABE87422-871D-4E0E-9266-A08F8678719F}"/>
               </a:ext>
             </a:extLst>
           </p:cNvPr>
@@ -6088,7 +6088,7 @@
           <p:cNvPr id="12" name="">
             <a:extLst xmlns:a="http://schemas.openxmlformats.org/drawingml/2006/main">
               <a:ext uri="{FF2B5EF4-FFF2-40B4-BE49-F238E27FC236}">
-                <a16:creationId xmlns:a16="http://schemas.microsoft.com/office/drawing/2014/main" id="{BFAC1999-FD52-4F2B-8D2D-AF992C557811}"/>
+                <a16:creationId xmlns:a16="http://schemas.microsoft.com/office/drawing/2014/main" id="{CB656423-A26E-49A1-A316-7A70E25C87AB}"/>
               </a:ext>
             </a:extLst>
           </p:cNvPr>
@@ -6145,7 +6145,7 @@
           <p:cNvPr id="13" name="">
             <a:extLst xmlns:a="http://schemas.openxmlformats.org/drawingml/2006/main">
               <a:ext uri="{FF2B5EF4-FFF2-40B4-BE49-F238E27FC236}">
-                <a16:creationId xmlns:a16="http://schemas.microsoft.com/office/drawing/2014/main" id="{68F534AE-F424-40E3-99DB-0D606DD1A804}"/>
+                <a16:creationId xmlns:a16="http://schemas.microsoft.com/office/drawing/2014/main" id="{6B8C15B4-C71E-4871-A41A-AF01D418AB3B}"/>
               </a:ext>
             </a:extLst>
           </p:cNvPr>
@@ -6202,7 +6202,7 @@
           <p:cNvPr id="14" name="">
             <a:extLst xmlns:a="http://schemas.openxmlformats.org/drawingml/2006/main">
               <a:ext uri="{FF2B5EF4-FFF2-40B4-BE49-F238E27FC236}">
-                <a16:creationId xmlns:a16="http://schemas.microsoft.com/office/drawing/2014/main" id="{BB73D782-2088-4F79-801F-ECC71681BD70}"/>
+                <a16:creationId xmlns:a16="http://schemas.microsoft.com/office/drawing/2014/main" id="{82CF3BD7-CA13-4319-BE88-4AFCA669ADDB}"/>
               </a:ext>
             </a:extLst>
           </p:cNvPr>
@@ -6236,7 +6236,7 @@
           <p:cNvPr id="15" name="">
             <a:extLst xmlns:a="http://schemas.openxmlformats.org/drawingml/2006/main">
               <a:ext uri="{FF2B5EF4-FFF2-40B4-BE49-F238E27FC236}">
-                <a16:creationId xmlns:a16="http://schemas.microsoft.com/office/drawing/2014/main" id="{2C446F98-00D7-46A8-A32D-1A993C617032}"/>
+                <a16:creationId xmlns:a16="http://schemas.microsoft.com/office/drawing/2014/main" id="{FF56E7EB-454B-4150-91D7-75D232C04162}"/>
               </a:ext>
             </a:extLst>
           </p:cNvPr>
@@ -6268,7 +6268,7 @@
           <p:cNvPr id="16" name="">
             <a:extLst xmlns:a="http://schemas.openxmlformats.org/drawingml/2006/main">
               <a:ext uri="{FF2B5EF4-FFF2-40B4-BE49-F238E27FC236}">
-                <a16:creationId xmlns:a16="http://schemas.microsoft.com/office/drawing/2014/main" id="{21CF4C4B-24F0-45DE-9C02-0813ECADEE43}"/>
+                <a16:creationId xmlns:a16="http://schemas.microsoft.com/office/drawing/2014/main" id="{488EBB1E-8C2A-460D-873E-9AD6880283F1}"/>
               </a:ext>
             </a:extLst>
           </p:cNvPr>
@@ -6325,7 +6325,7 @@
           <p:cNvPr id="17" name="">
             <a:extLst xmlns:a="http://schemas.openxmlformats.org/drawingml/2006/main">
               <a:ext uri="{FF2B5EF4-FFF2-40B4-BE49-F238E27FC236}">
-                <a16:creationId xmlns:a16="http://schemas.microsoft.com/office/drawing/2014/main" id="{02CCBC30-557A-4DCE-8B72-0F2626725FF2}"/>
+                <a16:creationId xmlns:a16="http://schemas.microsoft.com/office/drawing/2014/main" id="{8598A31C-1D37-4B24-B5BF-986898FA167B}"/>
               </a:ext>
             </a:extLst>
           </p:cNvPr>
@@ -6382,7 +6382,7 @@
           <p:cNvPr id="18" name="">
             <a:extLst xmlns:a="http://schemas.openxmlformats.org/drawingml/2006/main">
               <a:ext uri="{FF2B5EF4-FFF2-40B4-BE49-F238E27FC236}">
-                <a16:creationId xmlns:a16="http://schemas.microsoft.com/office/drawing/2014/main" id="{CDE3062A-4150-4648-82A9-B585931F12DD}"/>
+                <a16:creationId xmlns:a16="http://schemas.microsoft.com/office/drawing/2014/main" id="{BB98651A-0831-4784-B409-57EC447D51E0}"/>
               </a:ext>
             </a:extLst>
           </p:cNvPr>
@@ -6416,7 +6416,7 @@
           <p:cNvPr id="19" name="">
             <a:extLst xmlns:a="http://schemas.openxmlformats.org/drawingml/2006/main">
               <a:ext uri="{FF2B5EF4-FFF2-40B4-BE49-F238E27FC236}">
-                <a16:creationId xmlns:a16="http://schemas.microsoft.com/office/drawing/2014/main" id="{7220AB4B-2F96-4C79-890B-F5A7D3E59CA5}"/>
+                <a16:creationId xmlns:a16="http://schemas.microsoft.com/office/drawing/2014/main" id="{03C47E84-EBD2-4444-BF12-49615B229CCD}"/>
               </a:ext>
             </a:extLst>
           </p:cNvPr>
@@ -6448,7 +6448,7 @@
           <p:cNvPr id="20" name="">
             <a:extLst xmlns:a="http://schemas.openxmlformats.org/drawingml/2006/main">
               <a:ext uri="{FF2B5EF4-FFF2-40B4-BE49-F238E27FC236}">
-                <a16:creationId xmlns:a16="http://schemas.microsoft.com/office/drawing/2014/main" id="{F45E359B-8CCD-43DC-8650-EFD78EA560DD}"/>
+                <a16:creationId xmlns:a16="http://schemas.microsoft.com/office/drawing/2014/main" id="{244A8184-E770-477B-809B-31B15AB5507D}"/>
               </a:ext>
             </a:extLst>
           </p:cNvPr>
@@ -6505,7 +6505,7 @@
           <p:cNvPr id="21" name="">
             <a:extLst xmlns:a="http://schemas.openxmlformats.org/drawingml/2006/main">
               <a:ext uri="{FF2B5EF4-FFF2-40B4-BE49-F238E27FC236}">
-                <a16:creationId xmlns:a16="http://schemas.microsoft.com/office/drawing/2014/main" id="{F05175EF-C60E-4904-AB4A-2051D417C067}"/>
+                <a16:creationId xmlns:a16="http://schemas.microsoft.com/office/drawing/2014/main" id="{FC244771-EC24-4310-8B93-709D5DA4CBD5}"/>
               </a:ext>
             </a:extLst>
           </p:cNvPr>
@@ -6562,7 +6562,7 @@
           <p:cNvPr id="22" name="">
             <a:extLst xmlns:a="http://schemas.openxmlformats.org/drawingml/2006/main">
               <a:ext uri="{FF2B5EF4-FFF2-40B4-BE49-F238E27FC236}">
-                <a16:creationId xmlns:a16="http://schemas.microsoft.com/office/drawing/2014/main" id="{09BB7BF4-F4F2-4324-AF5F-9A78F7DFF53A}"/>
+                <a16:creationId xmlns:a16="http://schemas.microsoft.com/office/drawing/2014/main" id="{F77EEDA9-45CC-40C3-A38D-BD066BBC24D3}"/>
               </a:ext>
             </a:extLst>
           </p:cNvPr>
@@ -6617,7 +6617,7 @@
     </p:spTree>
     <p:extLst>
       <p:ext uri="{BB962C8B-B14F-4D97-AF65-F5344CB8AC3E}">
-        <p14:creationId xmlns:p14="http://schemas.microsoft.com/office/powerpoint/2010/main" val="1153115020"/>
+        <p14:creationId xmlns:p14="http://schemas.microsoft.com/office/powerpoint/2010/main" val="119258014"/>
       </p:ext>
     </p:extLst>
   </p:cSld>
@@ -6818,7 +6818,7 @@
           <p:cNvPr id="16" name="">
             <a:extLst xmlns:a="http://schemas.openxmlformats.org/drawingml/2006/main">
               <a:ext uri="{FF2B5EF4-FFF2-40B4-BE49-F238E27FC236}">
-                <a16:creationId xmlns:a16="http://schemas.microsoft.com/office/drawing/2014/main" id="{F04A5ADD-6A66-456A-9F5C-A8427EC727E9}"/>
+                <a16:creationId xmlns:a16="http://schemas.microsoft.com/office/drawing/2014/main" id="{4430EF50-53F7-47F1-A82C-A94FA8325DD3}"/>
               </a:ext>
             </a:extLst>
           </p:cNvPr>
@@ -6850,7 +6850,7 @@
           <p:cNvPr id="2" name="">
             <a:extLst xmlns:a="http://schemas.openxmlformats.org/drawingml/2006/main">
               <a:ext uri="{FF2B5EF4-FFF2-40B4-BE49-F238E27FC236}">
-                <a16:creationId xmlns:a16="http://schemas.microsoft.com/office/drawing/2014/main" id="{2B74794A-7C62-44B1-A47D-2FBABB084FA3}"/>
+                <a16:creationId xmlns:a16="http://schemas.microsoft.com/office/drawing/2014/main" id="{A8413CE1-165B-4440-9FE2-EFA54483E59F}"/>
               </a:ext>
             </a:extLst>
           </p:cNvPr>
@@ -6907,7 +6907,7 @@
           <p:cNvPr id="3" name="">
             <a:extLst xmlns:a="http://schemas.openxmlformats.org/drawingml/2006/main">
               <a:ext uri="{FF2B5EF4-FFF2-40B4-BE49-F238E27FC236}">
-                <a16:creationId xmlns:a16="http://schemas.microsoft.com/office/drawing/2014/main" id="{C6F33740-2FAB-42E9-B000-235EBE31C2DF}"/>
+                <a16:creationId xmlns:a16="http://schemas.microsoft.com/office/drawing/2014/main" id="{6A9B49C3-0D3C-4F7C-BF2B-5652CA335549}"/>
               </a:ext>
             </a:extLst>
           </p:cNvPr>
@@ -6939,7 +6939,7 @@
           <p:cNvPr id="4" name="">
             <a:extLst xmlns:a="http://schemas.openxmlformats.org/drawingml/2006/main">
               <a:ext uri="{FF2B5EF4-FFF2-40B4-BE49-F238E27FC236}">
-                <a16:creationId xmlns:a16="http://schemas.microsoft.com/office/drawing/2014/main" id="{4CA74EE8-007E-41F6-9708-85F2C76C8D54}"/>
+                <a16:creationId xmlns:a16="http://schemas.microsoft.com/office/drawing/2014/main" id="{0B00C3E7-C158-4AB1-ABB0-69EE7996B8EB}"/>
               </a:ext>
             </a:extLst>
           </p:cNvPr>
@@ -6996,7 +6996,7 @@
           <p:cNvPr id="5" name="">
             <a:extLst xmlns:a="http://schemas.openxmlformats.org/drawingml/2006/main">
               <a:ext uri="{FF2B5EF4-FFF2-40B4-BE49-F238E27FC236}">
-                <a16:creationId xmlns:a16="http://schemas.microsoft.com/office/drawing/2014/main" id="{1C31608D-0E6E-4679-BFB9-989C84729AF5}"/>
+                <a16:creationId xmlns:a16="http://schemas.microsoft.com/office/drawing/2014/main" id="{E8A2E439-4055-47B7-8891-7A1A67AFE632}"/>
               </a:ext>
             </a:extLst>
           </p:cNvPr>
@@ -7053,7 +7053,7 @@
           <p:cNvPr id="6" name="">
             <a:extLst xmlns:a="http://schemas.openxmlformats.org/drawingml/2006/main">
               <a:ext uri="{FF2B5EF4-FFF2-40B4-BE49-F238E27FC236}">
-                <a16:creationId xmlns:a16="http://schemas.microsoft.com/office/drawing/2014/main" id="{F354EDEA-2881-42FB-B972-1A07B86F3117}"/>
+                <a16:creationId xmlns:a16="http://schemas.microsoft.com/office/drawing/2014/main" id="{75D2A8C8-00E0-481D-95E0-83F85EC1A9EF}"/>
               </a:ext>
             </a:extLst>
           </p:cNvPr>
@@ -7110,7 +7110,7 @@
           <p:cNvPr id="7" name="">
             <a:extLst xmlns:a="http://schemas.openxmlformats.org/drawingml/2006/main">
               <a:ext uri="{FF2B5EF4-FFF2-40B4-BE49-F238E27FC236}">
-                <a16:creationId xmlns:a16="http://schemas.microsoft.com/office/drawing/2014/main" id="{47E8BC55-EC1E-444E-97A4-48B1B5BC3CE2}"/>
+                <a16:creationId xmlns:a16="http://schemas.microsoft.com/office/drawing/2014/main" id="{257507C4-E75B-4733-BFB2-030FB662BCB6}"/>
               </a:ext>
             </a:extLst>
           </p:cNvPr>
@@ -7142,7 +7142,7 @@
           <p:cNvPr id="8" name="">
             <a:extLst xmlns:a="http://schemas.openxmlformats.org/drawingml/2006/main">
               <a:ext uri="{FF2B5EF4-FFF2-40B4-BE49-F238E27FC236}">
-                <a16:creationId xmlns:a16="http://schemas.microsoft.com/office/drawing/2014/main" id="{00096DF2-90AA-4912-8B09-3F680C166AC4}"/>
+                <a16:creationId xmlns:a16="http://schemas.microsoft.com/office/drawing/2014/main" id="{7911DA16-B345-4C56-84CA-13668A21B261}"/>
               </a:ext>
             </a:extLst>
           </p:cNvPr>
@@ -7199,7 +7199,7 @@
           <p:cNvPr id="9" name="">
             <a:extLst xmlns:a="http://schemas.openxmlformats.org/drawingml/2006/main">
               <a:ext uri="{FF2B5EF4-FFF2-40B4-BE49-F238E27FC236}">
-                <a16:creationId xmlns:a16="http://schemas.microsoft.com/office/drawing/2014/main" id="{74834704-5989-453C-9DF2-F7C1F18A4ECF}"/>
+                <a16:creationId xmlns:a16="http://schemas.microsoft.com/office/drawing/2014/main" id="{5B5DDC63-9456-4CB8-9426-618294CC8C67}"/>
               </a:ext>
             </a:extLst>
           </p:cNvPr>
@@ -7256,7 +7256,7 @@
           <p:cNvPr id="10" name="">
             <a:extLst xmlns:a="http://schemas.openxmlformats.org/drawingml/2006/main">
               <a:ext uri="{FF2B5EF4-FFF2-40B4-BE49-F238E27FC236}">
-                <a16:creationId xmlns:a16="http://schemas.microsoft.com/office/drawing/2014/main" id="{57955643-CA67-4749-8E13-5511A740CD94}"/>
+                <a16:creationId xmlns:a16="http://schemas.microsoft.com/office/drawing/2014/main" id="{D04D9053-43B5-4AE9-B1C9-155C4CECABC2}"/>
               </a:ext>
             </a:extLst>
           </p:cNvPr>
@@ -7313,7 +7313,7 @@
           <p:cNvPr id="11" name="">
             <a:extLst xmlns:a="http://schemas.openxmlformats.org/drawingml/2006/main">
               <a:ext uri="{FF2B5EF4-FFF2-40B4-BE49-F238E27FC236}">
-                <a16:creationId xmlns:a16="http://schemas.microsoft.com/office/drawing/2014/main" id="{7A782210-2A95-4D72-BCC3-77207B48ADFC}"/>
+                <a16:creationId xmlns:a16="http://schemas.microsoft.com/office/drawing/2014/main" id="{583C5073-2E35-46CC-AA0E-338BF873D17E}"/>
               </a:ext>
             </a:extLst>
           </p:cNvPr>
@@ -7345,7 +7345,7 @@
           <p:cNvPr id="12" name="">
             <a:extLst xmlns:a="http://schemas.openxmlformats.org/drawingml/2006/main">
               <a:ext uri="{FF2B5EF4-FFF2-40B4-BE49-F238E27FC236}">
-                <a16:creationId xmlns:a16="http://schemas.microsoft.com/office/drawing/2014/main" id="{62A364A4-1663-49EE-812A-782565BBE3F4}"/>
+                <a16:creationId xmlns:a16="http://schemas.microsoft.com/office/drawing/2014/main" id="{B0AF3970-E48A-44C5-AD21-02B76C33FA23}"/>
               </a:ext>
             </a:extLst>
           </p:cNvPr>
@@ -7402,7 +7402,7 @@
           <p:cNvPr id="13" name="">
             <a:extLst xmlns:a="http://schemas.openxmlformats.org/drawingml/2006/main">
               <a:ext uri="{FF2B5EF4-FFF2-40B4-BE49-F238E27FC236}">
-                <a16:creationId xmlns:a16="http://schemas.microsoft.com/office/drawing/2014/main" id="{1185A344-6E11-43D7-A62C-3B0C18E0ABAE}"/>
+                <a16:creationId xmlns:a16="http://schemas.microsoft.com/office/drawing/2014/main" id="{13EFF2DB-C360-4F28-9E22-5424CBAF4BD9}"/>
               </a:ext>
             </a:extLst>
           </p:cNvPr>
@@ -7459,7 +7459,7 @@
           <p:cNvPr id="14" name="">
             <a:extLst xmlns:a="http://schemas.openxmlformats.org/drawingml/2006/main">
               <a:ext uri="{FF2B5EF4-FFF2-40B4-BE49-F238E27FC236}">
-                <a16:creationId xmlns:a16="http://schemas.microsoft.com/office/drawing/2014/main" id="{513941E3-1054-44C4-8EF7-FB4689708736}"/>
+                <a16:creationId xmlns:a16="http://schemas.microsoft.com/office/drawing/2014/main" id="{11F537AA-7915-4E13-94A9-9C32067C1A8C}"/>
               </a:ext>
             </a:extLst>
           </p:cNvPr>
@@ -7516,7 +7516,7 @@
           <p:cNvPr id="15" name="">
             <a:extLst xmlns:a="http://schemas.openxmlformats.org/drawingml/2006/main">
               <a:ext uri="{FF2B5EF4-FFF2-40B4-BE49-F238E27FC236}">
-                <a16:creationId xmlns:a16="http://schemas.microsoft.com/office/drawing/2014/main" id="{B289EE05-AA42-4F77-AE51-3EBB08B6B546}"/>
+                <a16:creationId xmlns:a16="http://schemas.microsoft.com/office/drawing/2014/main" id="{E7DE9028-AA54-4C56-AE0C-73F15CCE2CF9}"/>
               </a:ext>
             </a:extLst>
           </p:cNvPr>
@@ -7571,7 +7571,7 @@
     </p:spTree>
     <p:extLst>
       <p:ext uri="{BB962C8B-B14F-4D97-AF65-F5344CB8AC3E}">
-        <p14:creationId xmlns:p14="http://schemas.microsoft.com/office/powerpoint/2010/main" val="1330497709"/>
+        <p14:creationId xmlns:p14="http://schemas.microsoft.com/office/powerpoint/2010/main" val="810133725"/>
       </p:ext>
     </p:extLst>
   </p:cSld>
@@ -7769,10 +7769,10 @@
       </p:grpSpPr>
       <p:sp>
         <p:nvSpPr>
-          <p:cNvPr id="23" name="">
-            <a:extLst xmlns:a="http://schemas.openxmlformats.org/drawingml/2006/main">
-              <a:ext uri="{FF2B5EF4-FFF2-40B4-BE49-F238E27FC236}">
-                <a16:creationId xmlns:a16="http://schemas.microsoft.com/office/drawing/2014/main" id="{D4F18203-12D9-46E2-92BB-2A1D8E298EC6}"/>
+          <p:cNvPr id="26" name="">
+            <a:extLst xmlns:a="http://schemas.openxmlformats.org/drawingml/2006/main">
+              <a:ext uri="{FF2B5EF4-FFF2-40B4-BE49-F238E27FC236}">
+                <a16:creationId xmlns:a16="http://schemas.microsoft.com/office/drawing/2014/main" id="{3BB2D917-5DE4-49D1-9AC1-CC8D44D6131D}"/>
               </a:ext>
             </a:extLst>
           </p:cNvPr>
@@ -7804,7 +7804,7 @@
           <p:cNvPr id="2" name="">
             <a:extLst xmlns:a="http://schemas.openxmlformats.org/drawingml/2006/main">
               <a:ext uri="{FF2B5EF4-FFF2-40B4-BE49-F238E27FC236}">
-                <a16:creationId xmlns:a16="http://schemas.microsoft.com/office/drawing/2014/main" id="{D92CE2F4-4A09-4C21-B45C-0E6D6B81F7CA}"/>
+                <a16:creationId xmlns:a16="http://schemas.microsoft.com/office/drawing/2014/main" id="{D07AED79-B9D0-44D4-AF13-20232C14A60C}"/>
               </a:ext>
             </a:extLst>
           </p:cNvPr>
@@ -7861,7 +7861,7 @@
           <p:cNvPr id="3" name="">
             <a:extLst xmlns:a="http://schemas.openxmlformats.org/drawingml/2006/main">
               <a:ext uri="{FF2B5EF4-FFF2-40B4-BE49-F238E27FC236}">
-                <a16:creationId xmlns:a16="http://schemas.microsoft.com/office/drawing/2014/main" id="{171BB516-CF6C-4521-AD37-269B6ED70E47}"/>
+                <a16:creationId xmlns:a16="http://schemas.microsoft.com/office/drawing/2014/main" id="{7D40262F-1229-4A6F-AFDA-19928E5FED7B}"/>
               </a:ext>
             </a:extLst>
           </p:cNvPr>
@@ -7893,7 +7893,7 @@
           <p:cNvPr id="4" name="">
             <a:extLst xmlns:a="http://schemas.openxmlformats.org/drawingml/2006/main">
               <a:ext uri="{FF2B5EF4-FFF2-40B4-BE49-F238E27FC236}">
-                <a16:creationId xmlns:a16="http://schemas.microsoft.com/office/drawing/2014/main" id="{4336448D-49D1-4F94-A12E-4ADCBB359966}"/>
+                <a16:creationId xmlns:a16="http://schemas.microsoft.com/office/drawing/2014/main" id="{EFD45BA8-5D6B-4363-B88F-13B1993F89D1}"/>
               </a:ext>
             </a:extLst>
           </p:cNvPr>
@@ -7950,7 +7950,7 @@
           <p:cNvPr id="5" name="">
             <a:extLst xmlns:a="http://schemas.openxmlformats.org/drawingml/2006/main">
               <a:ext uri="{FF2B5EF4-FFF2-40B4-BE49-F238E27FC236}">
-                <a16:creationId xmlns:a16="http://schemas.microsoft.com/office/drawing/2014/main" id="{E27B6CE7-5984-4391-8CA8-21BCF94D8EB6}"/>
+                <a16:creationId xmlns:a16="http://schemas.microsoft.com/office/drawing/2014/main" id="{63578CC0-73F2-4382-9430-7F26D6F8F44F}"/>
               </a:ext>
             </a:extLst>
           </p:cNvPr>
@@ -8007,7 +8007,7 @@
           <p:cNvPr id="6" name="">
             <a:extLst xmlns:a="http://schemas.openxmlformats.org/drawingml/2006/main">
               <a:ext uri="{FF2B5EF4-FFF2-40B4-BE49-F238E27FC236}">
-                <a16:creationId xmlns:a16="http://schemas.microsoft.com/office/drawing/2014/main" id="{AF5213B2-0C4B-4E5A-847F-89433DAE4E10}"/>
+                <a16:creationId xmlns:a16="http://schemas.microsoft.com/office/drawing/2014/main" id="{3771F0C3-D670-45F2-9458-73C705739E79}"/>
               </a:ext>
             </a:extLst>
           </p:cNvPr>
@@ -8064,7 +8064,7 @@
           <p:cNvPr id="7" name="">
             <a:extLst xmlns:a="http://schemas.openxmlformats.org/drawingml/2006/main">
               <a:ext uri="{FF2B5EF4-FFF2-40B4-BE49-F238E27FC236}">
-                <a16:creationId xmlns:a16="http://schemas.microsoft.com/office/drawing/2014/main" id="{781820A1-E9C0-4E1D-A8D7-021BC9A70777}"/>
+                <a16:creationId xmlns:a16="http://schemas.microsoft.com/office/drawing/2014/main" id="{9248DE8E-FF10-4DF8-9ED5-ADB44E48088B}"/>
               </a:ext>
             </a:extLst>
           </p:cNvPr>
@@ -8096,7 +8096,7 @@
           <p:cNvPr id="8" name="">
             <a:extLst xmlns:a="http://schemas.openxmlformats.org/drawingml/2006/main">
               <a:ext uri="{FF2B5EF4-FFF2-40B4-BE49-F238E27FC236}">
-                <a16:creationId xmlns:a16="http://schemas.microsoft.com/office/drawing/2014/main" id="{2A54EC39-9D3C-461F-B757-337A70C56CB6}"/>
+                <a16:creationId xmlns:a16="http://schemas.microsoft.com/office/drawing/2014/main" id="{222EE379-2869-4ABB-8F77-0F755A2A80C2}"/>
               </a:ext>
             </a:extLst>
           </p:cNvPr>
@@ -8153,7 +8153,7 @@
           <p:cNvPr id="9" name="">
             <a:extLst xmlns:a="http://schemas.openxmlformats.org/drawingml/2006/main">
               <a:ext uri="{FF2B5EF4-FFF2-40B4-BE49-F238E27FC236}">
-                <a16:creationId xmlns:a16="http://schemas.microsoft.com/office/drawing/2014/main" id="{D7609C4A-98A4-4B9B-ABBA-280F70D83BF8}"/>
+                <a16:creationId xmlns:a16="http://schemas.microsoft.com/office/drawing/2014/main" id="{0CFDE325-9983-4B69-B7B7-380DEADA30C8}"/>
               </a:ext>
             </a:extLst>
           </p:cNvPr>
@@ -8210,19 +8210,19 @@
           <p:cNvPr id="10" name="">
             <a:extLst xmlns:a="http://schemas.openxmlformats.org/drawingml/2006/main">
               <a:ext uri="{FF2B5EF4-FFF2-40B4-BE49-F238E27FC236}">
-                <a16:creationId xmlns:a16="http://schemas.microsoft.com/office/drawing/2014/main" id="{795DDC32-09E6-4456-A649-FE33BF99A0F3}"/>
-              </a:ext>
-            </a:extLst>
-          </p:cNvPr>
-          <p:cNvSpPr>
-            <a:spLocks xmlns:a="http://schemas.openxmlformats.org/drawingml/2006/main" noGrp="1"/>
-          </p:cNvSpPr>
-          <p:nvPr/>
-        </p:nvSpPr>
-        <p:spPr>
-          <a:xfrm xmlns:a="http://schemas.openxmlformats.org/drawingml/2006/main">
-            <a:off x="914400" y="1257300"/>
-            <a:ext cx="10363200" cy="781050"/>
+                <a16:creationId xmlns:a16="http://schemas.microsoft.com/office/drawing/2014/main" id="{60FD35E4-7592-4D8C-BF09-59349661C30F}"/>
+              </a:ext>
+            </a:extLst>
+          </p:cNvPr>
+          <p:cNvSpPr>
+            <a:spLocks xmlns:a="http://schemas.openxmlformats.org/drawingml/2006/main" noGrp="1"/>
+          </p:cNvSpPr>
+          <p:nvPr/>
+        </p:nvSpPr>
+        <p:spPr>
+          <a:xfrm xmlns:a="http://schemas.openxmlformats.org/drawingml/2006/main">
+            <a:off x="857250" y="1219200"/>
+            <a:ext cx="10477500" cy="742950"/>
           </a:xfrm>
           <a:prstGeom xmlns:a="http://schemas.openxmlformats.org/drawingml/2006/main" prst="rect">
             <a:avLst/>
@@ -8239,7 +8239,7 @@
           <a:lstStyle xmlns:a="http://schemas.openxmlformats.org/drawingml/2006/main"/>
           <a:p xmlns:a="http://schemas.openxmlformats.org/drawingml/2006/main">
             <a:pPr algn="ctr">
-              <a:defRPr sz="2175" b="1">
+              <a:defRPr sz="2100" b="1">
                 <a:solidFill>
                   <a:srgbClr val="17253A"/>
                 </a:solidFill>
@@ -8249,7 +8249,7 @@
               </a:defRPr>
             </a:pPr>
             <a:r>
-              <a:rPr sz="2175" b="1">
+              <a:rPr sz="2100" b="1">
                 <a:solidFill>
                   <a:srgbClr val="17253A"/>
                 </a:solidFill>
@@ -8267,28 +8267,30 @@
           <p:cNvPr id="11" name="">
             <a:extLst xmlns:a="http://schemas.openxmlformats.org/drawingml/2006/main">
               <a:ext uri="{FF2B5EF4-FFF2-40B4-BE49-F238E27FC236}">
-                <a16:creationId xmlns:a16="http://schemas.microsoft.com/office/drawing/2014/main" id="{50824CDA-D9AC-44B4-A657-CACF13390D99}"/>
-              </a:ext>
-            </a:extLst>
-          </p:cNvPr>
-          <p:cNvSpPr>
-            <a:spLocks xmlns:a="http://schemas.openxmlformats.org/drawingml/2006/main" noGrp="1"/>
-          </p:cNvSpPr>
-          <p:nvPr/>
-        </p:nvSpPr>
-        <p:spPr>
-          <a:xfrm xmlns:a="http://schemas.openxmlformats.org/drawingml/2006/main">
-            <a:off x="1000125" y="2247900"/>
-            <a:ext cx="476250" cy="476250"/>
-          </a:xfrm>
-          <a:prstGeom xmlns:a="http://schemas.openxmlformats.org/drawingml/2006/main" prst="ellipse">
+                <a16:creationId xmlns:a16="http://schemas.microsoft.com/office/drawing/2014/main" id="{36884AC7-9192-43B8-B27A-E9354569D33A}"/>
+              </a:ext>
+            </a:extLst>
+          </p:cNvPr>
+          <p:cNvSpPr>
+            <a:spLocks xmlns:a="http://schemas.openxmlformats.org/drawingml/2006/main" noGrp="1"/>
+          </p:cNvSpPr>
+          <p:nvPr/>
+        </p:nvSpPr>
+        <p:spPr>
+          <a:xfrm xmlns:a="http://schemas.openxmlformats.org/drawingml/2006/main">
+            <a:off x="971550" y="2124075"/>
+            <a:ext cx="38100" cy="3524250"/>
+          </a:xfrm>
+          <a:prstGeom xmlns:a="http://schemas.openxmlformats.org/drawingml/2006/main" prst="rect">
             <a:avLst/>
           </a:prstGeom>
           <a:solidFill xmlns:a="http://schemas.openxmlformats.org/drawingml/2006/main">
-            <a:srgbClr val="18324A"/>
+            <a:srgbClr val="2C6E73"/>
           </a:solidFill>
           <a:ln xmlns:a="http://schemas.openxmlformats.org/drawingml/2006/main" w="0">
-            <a:noFill/>
+            <a:solidFill>
+              <a:srgbClr val="2C6E73"/>
+            </a:solidFill>
           </a:ln>
         </p:spPr>
       </p:sp>
@@ -8297,19 +8299,19 @@
           <p:cNvPr id="12" name="">
             <a:extLst xmlns:a="http://schemas.openxmlformats.org/drawingml/2006/main">
               <a:ext uri="{FF2B5EF4-FFF2-40B4-BE49-F238E27FC236}">
-                <a16:creationId xmlns:a16="http://schemas.microsoft.com/office/drawing/2014/main" id="{E39394CB-66C3-4160-A5C1-5379D3778626}"/>
-              </a:ext>
-            </a:extLst>
-          </p:cNvPr>
-          <p:cNvSpPr>
-            <a:spLocks xmlns:a="http://schemas.openxmlformats.org/drawingml/2006/main" noGrp="1"/>
-          </p:cNvSpPr>
-          <p:nvPr/>
-        </p:nvSpPr>
-        <p:spPr>
-          <a:xfrm xmlns:a="http://schemas.openxmlformats.org/drawingml/2006/main">
-            <a:off x="1000125" y="2276475"/>
-            <a:ext cx="476250" cy="419100"/>
+                <a16:creationId xmlns:a16="http://schemas.microsoft.com/office/drawing/2014/main" id="{70266A3B-BA1F-4DBD-94EA-AAAF8BF42DFC}"/>
+              </a:ext>
+            </a:extLst>
+          </p:cNvPr>
+          <p:cNvSpPr>
+            <a:spLocks xmlns:a="http://schemas.openxmlformats.org/drawingml/2006/main" noGrp="1"/>
+          </p:cNvSpPr>
+          <p:nvPr/>
+        </p:nvSpPr>
+        <p:spPr>
+          <a:xfrm xmlns:a="http://schemas.openxmlformats.org/drawingml/2006/main">
+            <a:off x="1162050" y="2200275"/>
+            <a:ext cx="400050" cy="400050"/>
           </a:xfrm>
           <a:prstGeom xmlns:a="http://schemas.openxmlformats.org/drawingml/2006/main" prst="rect">
             <a:avLst/>
@@ -8326,9 +8328,9 @@
           <a:lstStyle xmlns:a="http://schemas.openxmlformats.org/drawingml/2006/main"/>
           <a:p xmlns:a="http://schemas.openxmlformats.org/drawingml/2006/main">
             <a:pPr algn="ctr">
-              <a:defRPr sz="1350" b="1">
-                <a:solidFill>
-                  <a:srgbClr val="FFFFFF"/>
+              <a:defRPr sz="1125" b="1">
+                <a:solidFill>
+                  <a:srgbClr val="2C6E73"/>
                 </a:solidFill>
                 <a:latin typeface="Arial"/>
                 <a:ea typeface="Arial"/>
@@ -8336,9 +8338,9 @@
               </a:defRPr>
             </a:pPr>
             <a:r>
-              <a:rPr sz="1350" b="1">
-                <a:solidFill>
-                  <a:srgbClr val="FFFFFF"/>
+              <a:rPr sz="1125" b="1">
+                <a:solidFill>
+                  <a:srgbClr val="2C6E73"/>
                 </a:solidFill>
                 <a:latin typeface="Arial"/>
                 <a:ea typeface="Arial"/>
@@ -8354,19 +8356,19 @@
           <p:cNvPr id="13" name="">
             <a:extLst xmlns:a="http://schemas.openxmlformats.org/drawingml/2006/main">
               <a:ext uri="{FF2B5EF4-FFF2-40B4-BE49-F238E27FC236}">
-                <a16:creationId xmlns:a16="http://schemas.microsoft.com/office/drawing/2014/main" id="{B5C7A1B8-B029-4DFD-AB8F-B5C7284C43FE}"/>
-              </a:ext>
-            </a:extLst>
-          </p:cNvPr>
-          <p:cNvSpPr>
-            <a:spLocks xmlns:a="http://schemas.openxmlformats.org/drawingml/2006/main" noGrp="1"/>
-          </p:cNvSpPr>
-          <p:nvPr/>
-        </p:nvSpPr>
-        <p:spPr>
-          <a:xfrm xmlns:a="http://schemas.openxmlformats.org/drawingml/2006/main">
-            <a:off x="1714500" y="2181225"/>
-            <a:ext cx="9429750" cy="609600"/>
+                <a16:creationId xmlns:a16="http://schemas.microsoft.com/office/drawing/2014/main" id="{6EA3B685-9A9C-445D-96CE-EE82EECA8A37}"/>
+              </a:ext>
+            </a:extLst>
+          </p:cNvPr>
+          <p:cNvSpPr>
+            <a:spLocks xmlns:a="http://schemas.openxmlformats.org/drawingml/2006/main" noGrp="1"/>
+          </p:cNvSpPr>
+          <p:nvPr/>
+        </p:nvSpPr>
+        <p:spPr>
+          <a:xfrm xmlns:a="http://schemas.openxmlformats.org/drawingml/2006/main">
+            <a:off x="1714500" y="2114550"/>
+            <a:ext cx="9525000" cy="638175"/>
           </a:xfrm>
           <a:prstGeom xmlns:a="http://schemas.openxmlformats.org/drawingml/2006/main" prst="rect">
             <a:avLst/>
@@ -8383,7 +8385,7 @@
           <a:lstStyle xmlns:a="http://schemas.openxmlformats.org/drawingml/2006/main"/>
           <a:p xmlns:a="http://schemas.openxmlformats.org/drawingml/2006/main">
             <a:pPr algn="l">
-              <a:defRPr sz="1500" b="0">
+              <a:defRPr sz="1575" b="0">
                 <a:solidFill>
                   <a:srgbClr val="17253A"/>
                 </a:solidFill>
@@ -8393,7 +8395,7 @@
               </a:defRPr>
             </a:pPr>
             <a:r>
-              <a:rPr sz="1500" b="0">
+              <a:rPr sz="1575" b="0">
                 <a:solidFill>
                   <a:srgbClr val="17253A"/>
                 </a:solidFill>
@@ -8401,7 +8403,7 @@
                 <a:ea typeface="Arial"/>
                 <a:cs typeface="Arial"/>
               </a:rPr>
-              <a:t>Identify the structure: Notice the number structure before choosing a method.</a:t>
+              <a:t>499,999 + 235,678</a:t>
             </a:r>
           </a:p>
         </p:txBody>
@@ -8411,28 +8413,30 @@
           <p:cNvPr id="14" name="">
             <a:extLst xmlns:a="http://schemas.openxmlformats.org/drawingml/2006/main">
               <a:ext uri="{FF2B5EF4-FFF2-40B4-BE49-F238E27FC236}">
-                <a16:creationId xmlns:a16="http://schemas.microsoft.com/office/drawing/2014/main" id="{CBF9135A-6496-4AF9-A9A6-D34EC6AE3593}"/>
-              </a:ext>
-            </a:extLst>
-          </p:cNvPr>
-          <p:cNvSpPr>
-            <a:spLocks xmlns:a="http://schemas.openxmlformats.org/drawingml/2006/main" noGrp="1"/>
-          </p:cNvSpPr>
-          <p:nvPr/>
-        </p:nvSpPr>
-        <p:spPr>
-          <a:xfrm xmlns:a="http://schemas.openxmlformats.org/drawingml/2006/main">
-            <a:off x="1000125" y="2990850"/>
-            <a:ext cx="476250" cy="476250"/>
-          </a:xfrm>
-          <a:prstGeom xmlns:a="http://schemas.openxmlformats.org/drawingml/2006/main" prst="ellipse">
+                <a16:creationId xmlns:a16="http://schemas.microsoft.com/office/drawing/2014/main" id="{99D7B2E6-C802-4C66-99BB-14D333DF3873}"/>
+              </a:ext>
+            </a:extLst>
+          </p:cNvPr>
+          <p:cNvSpPr>
+            <a:spLocks xmlns:a="http://schemas.openxmlformats.org/drawingml/2006/main" noGrp="1"/>
+          </p:cNvSpPr>
+          <p:nvPr/>
+        </p:nvSpPr>
+        <p:spPr>
+          <a:xfrm xmlns:a="http://schemas.openxmlformats.org/drawingml/2006/main">
+            <a:off x="1714500" y="2771775"/>
+            <a:ext cx="9334500" cy="9525"/>
+          </a:xfrm>
+          <a:prstGeom xmlns:a="http://schemas.openxmlformats.org/drawingml/2006/main" prst="rect">
             <a:avLst/>
           </a:prstGeom>
           <a:solidFill xmlns:a="http://schemas.openxmlformats.org/drawingml/2006/main">
-            <a:srgbClr val="2C6E73"/>
+            <a:srgbClr val="D9E0E6"/>
           </a:solidFill>
           <a:ln xmlns:a="http://schemas.openxmlformats.org/drawingml/2006/main" w="0">
-            <a:noFill/>
+            <a:solidFill>
+              <a:srgbClr val="D9E0E6"/>
+            </a:solidFill>
           </a:ln>
         </p:spPr>
       </p:sp>
@@ -8441,19 +8445,19 @@
           <p:cNvPr id="15" name="">
             <a:extLst xmlns:a="http://schemas.openxmlformats.org/drawingml/2006/main">
               <a:ext uri="{FF2B5EF4-FFF2-40B4-BE49-F238E27FC236}">
-                <a16:creationId xmlns:a16="http://schemas.microsoft.com/office/drawing/2014/main" id="{73A06EDE-716E-4694-9127-A4C506AB275C}"/>
-              </a:ext>
-            </a:extLst>
-          </p:cNvPr>
-          <p:cNvSpPr>
-            <a:spLocks xmlns:a="http://schemas.openxmlformats.org/drawingml/2006/main" noGrp="1"/>
-          </p:cNvSpPr>
-          <p:nvPr/>
-        </p:nvSpPr>
-        <p:spPr>
-          <a:xfrm xmlns:a="http://schemas.openxmlformats.org/drawingml/2006/main">
-            <a:off x="1000125" y="3019425"/>
-            <a:ext cx="476250" cy="419100"/>
+                <a16:creationId xmlns:a16="http://schemas.microsoft.com/office/drawing/2014/main" id="{7AC97E92-619E-4508-91E0-75E7E4923E7E}"/>
+              </a:ext>
+            </a:extLst>
+          </p:cNvPr>
+          <p:cNvSpPr>
+            <a:spLocks xmlns:a="http://schemas.openxmlformats.org/drawingml/2006/main" noGrp="1"/>
+          </p:cNvSpPr>
+          <p:nvPr/>
+        </p:nvSpPr>
+        <p:spPr>
+          <a:xfrm xmlns:a="http://schemas.openxmlformats.org/drawingml/2006/main">
+            <a:off x="1162050" y="2905125"/>
+            <a:ext cx="400050" cy="400050"/>
           </a:xfrm>
           <a:prstGeom xmlns:a="http://schemas.openxmlformats.org/drawingml/2006/main" prst="rect">
             <a:avLst/>
@@ -8470,9 +8474,9 @@
           <a:lstStyle xmlns:a="http://schemas.openxmlformats.org/drawingml/2006/main"/>
           <a:p xmlns:a="http://schemas.openxmlformats.org/drawingml/2006/main">
             <a:pPr algn="ctr">
-              <a:defRPr sz="1350" b="1">
-                <a:solidFill>
-                  <a:srgbClr val="FFFFFF"/>
+              <a:defRPr sz="1125" b="1">
+                <a:solidFill>
+                  <a:srgbClr val="2C6E73"/>
                 </a:solidFill>
                 <a:latin typeface="Arial"/>
                 <a:ea typeface="Arial"/>
@@ -8480,9 +8484,9 @@
               </a:defRPr>
             </a:pPr>
             <a:r>
-              <a:rPr sz="1350" b="1">
-                <a:solidFill>
-                  <a:srgbClr val="FFFFFF"/>
+              <a:rPr sz="1125" b="1">
+                <a:solidFill>
+                  <a:srgbClr val="2C6E73"/>
                 </a:solidFill>
                 <a:latin typeface="Arial"/>
                 <a:ea typeface="Arial"/>
@@ -8498,19 +8502,19 @@
           <p:cNvPr id="16" name="">
             <a:extLst xmlns:a="http://schemas.openxmlformats.org/drawingml/2006/main">
               <a:ext uri="{FF2B5EF4-FFF2-40B4-BE49-F238E27FC236}">
-                <a16:creationId xmlns:a16="http://schemas.microsoft.com/office/drawing/2014/main" id="{1A7F2B31-6FBF-428F-B776-1B3B1B2EC966}"/>
-              </a:ext>
-            </a:extLst>
-          </p:cNvPr>
-          <p:cNvSpPr>
-            <a:spLocks xmlns:a="http://schemas.openxmlformats.org/drawingml/2006/main" noGrp="1"/>
-          </p:cNvSpPr>
-          <p:nvPr/>
-        </p:nvSpPr>
-        <p:spPr>
-          <a:xfrm xmlns:a="http://schemas.openxmlformats.org/drawingml/2006/main">
-            <a:off x="1714500" y="2924175"/>
-            <a:ext cx="9429750" cy="609600"/>
+                <a16:creationId xmlns:a16="http://schemas.microsoft.com/office/drawing/2014/main" id="{A76C945D-680E-41FA-A5AB-CE4C8CB93568}"/>
+              </a:ext>
+            </a:extLst>
+          </p:cNvPr>
+          <p:cNvSpPr>
+            <a:spLocks xmlns:a="http://schemas.openxmlformats.org/drawingml/2006/main" noGrp="1"/>
+          </p:cNvSpPr>
+          <p:nvPr/>
+        </p:nvSpPr>
+        <p:spPr>
+          <a:xfrm xmlns:a="http://schemas.openxmlformats.org/drawingml/2006/main">
+            <a:off x="1714500" y="2819400"/>
+            <a:ext cx="9525000" cy="638175"/>
           </a:xfrm>
           <a:prstGeom xmlns:a="http://schemas.openxmlformats.org/drawingml/2006/main" prst="rect">
             <a:avLst/>
@@ -8527,7 +8531,7 @@
           <a:lstStyle xmlns:a="http://schemas.openxmlformats.org/drawingml/2006/main"/>
           <a:p xmlns:a="http://schemas.openxmlformats.org/drawingml/2006/main">
             <a:pPr algn="l">
-              <a:defRPr sz="1500" b="0">
+              <a:defRPr sz="1575" b="0">
                 <a:solidFill>
                   <a:srgbClr val="17253A"/>
                 </a:solidFill>
@@ -8537,7 +8541,7 @@
               </a:defRPr>
             </a:pPr>
             <a:r>
-              <a:rPr sz="1500" b="0">
+              <a:rPr sz="1575" b="0">
                 <a:solidFill>
                   <a:srgbClr val="17253A"/>
                 </a:solidFill>
@@ -8545,7 +8549,7 @@
                 <a:ea typeface="Arial"/>
                 <a:cs typeface="Arial"/>
               </a:rPr>
-              <a:t>Set up the method: Use a known fact, partition or compensation to calculate efficiently.</a:t>
+              <a:t>Think 500,000 + 235,678</a:t>
             </a:r>
           </a:p>
         </p:txBody>
@@ -8555,28 +8559,30 @@
           <p:cNvPr id="17" name="">
             <a:extLst xmlns:a="http://schemas.openxmlformats.org/drawingml/2006/main">
               <a:ext uri="{FF2B5EF4-FFF2-40B4-BE49-F238E27FC236}">
-                <a16:creationId xmlns:a16="http://schemas.microsoft.com/office/drawing/2014/main" id="{2A2A09E4-6345-4CB0-B217-A5B115B9E0BC}"/>
-              </a:ext>
-            </a:extLst>
-          </p:cNvPr>
-          <p:cNvSpPr>
-            <a:spLocks xmlns:a="http://schemas.openxmlformats.org/drawingml/2006/main" noGrp="1"/>
-          </p:cNvSpPr>
-          <p:nvPr/>
-        </p:nvSpPr>
-        <p:spPr>
-          <a:xfrm xmlns:a="http://schemas.openxmlformats.org/drawingml/2006/main">
-            <a:off x="1000125" y="3733800"/>
-            <a:ext cx="476250" cy="476250"/>
-          </a:xfrm>
-          <a:prstGeom xmlns:a="http://schemas.openxmlformats.org/drawingml/2006/main" prst="ellipse">
+                <a16:creationId xmlns:a16="http://schemas.microsoft.com/office/drawing/2014/main" id="{EF46B571-47E6-4BE1-B825-49869FA85474}"/>
+              </a:ext>
+            </a:extLst>
+          </p:cNvPr>
+          <p:cNvSpPr>
+            <a:spLocks xmlns:a="http://schemas.openxmlformats.org/drawingml/2006/main" noGrp="1"/>
+          </p:cNvSpPr>
+          <p:nvPr/>
+        </p:nvSpPr>
+        <p:spPr>
+          <a:xfrm xmlns:a="http://schemas.openxmlformats.org/drawingml/2006/main">
+            <a:off x="1714500" y="3476625"/>
+            <a:ext cx="9334500" cy="9525"/>
+          </a:xfrm>
+          <a:prstGeom xmlns:a="http://schemas.openxmlformats.org/drawingml/2006/main" prst="rect">
             <a:avLst/>
           </a:prstGeom>
           <a:solidFill xmlns:a="http://schemas.openxmlformats.org/drawingml/2006/main">
-            <a:srgbClr val="2C6E73"/>
+            <a:srgbClr val="D9E0E6"/>
           </a:solidFill>
           <a:ln xmlns:a="http://schemas.openxmlformats.org/drawingml/2006/main" w="0">
-            <a:noFill/>
+            <a:solidFill>
+              <a:srgbClr val="D9E0E6"/>
+            </a:solidFill>
           </a:ln>
         </p:spPr>
       </p:sp>
@@ -8585,19 +8591,19 @@
           <p:cNvPr id="18" name="">
             <a:extLst xmlns:a="http://schemas.openxmlformats.org/drawingml/2006/main">
               <a:ext uri="{FF2B5EF4-FFF2-40B4-BE49-F238E27FC236}">
-                <a16:creationId xmlns:a16="http://schemas.microsoft.com/office/drawing/2014/main" id="{F1E3A793-BD10-401E-8583-7E2D550B845A}"/>
-              </a:ext>
-            </a:extLst>
-          </p:cNvPr>
-          <p:cNvSpPr>
-            <a:spLocks xmlns:a="http://schemas.openxmlformats.org/drawingml/2006/main" noGrp="1"/>
-          </p:cNvSpPr>
-          <p:nvPr/>
-        </p:nvSpPr>
-        <p:spPr>
-          <a:xfrm xmlns:a="http://schemas.openxmlformats.org/drawingml/2006/main">
-            <a:off x="1000125" y="3762375"/>
-            <a:ext cx="476250" cy="419100"/>
+                <a16:creationId xmlns:a16="http://schemas.microsoft.com/office/drawing/2014/main" id="{72A0F7BA-0B90-4B21-89D2-D6D9E4F67424}"/>
+              </a:ext>
+            </a:extLst>
+          </p:cNvPr>
+          <p:cNvSpPr>
+            <a:spLocks xmlns:a="http://schemas.openxmlformats.org/drawingml/2006/main" noGrp="1"/>
+          </p:cNvSpPr>
+          <p:nvPr/>
+        </p:nvSpPr>
+        <p:spPr>
+          <a:xfrm xmlns:a="http://schemas.openxmlformats.org/drawingml/2006/main">
+            <a:off x="1162050" y="3609975"/>
+            <a:ext cx="400050" cy="400050"/>
           </a:xfrm>
           <a:prstGeom xmlns:a="http://schemas.openxmlformats.org/drawingml/2006/main" prst="rect">
             <a:avLst/>
@@ -8614,9 +8620,9 @@
           <a:lstStyle xmlns:a="http://schemas.openxmlformats.org/drawingml/2006/main"/>
           <a:p xmlns:a="http://schemas.openxmlformats.org/drawingml/2006/main">
             <a:pPr algn="ctr">
-              <a:defRPr sz="1350" b="1">
-                <a:solidFill>
-                  <a:srgbClr val="FFFFFF"/>
+              <a:defRPr sz="1125" b="1">
+                <a:solidFill>
+                  <a:srgbClr val="2C6E73"/>
                 </a:solidFill>
                 <a:latin typeface="Arial"/>
                 <a:ea typeface="Arial"/>
@@ -8624,9 +8630,9 @@
               </a:defRPr>
             </a:pPr>
             <a:r>
-              <a:rPr sz="1350" b="1">
-                <a:solidFill>
-                  <a:srgbClr val="FFFFFF"/>
+              <a:rPr sz="1125" b="1">
+                <a:solidFill>
+                  <a:srgbClr val="2C6E73"/>
                 </a:solidFill>
                 <a:latin typeface="Arial"/>
                 <a:ea typeface="Arial"/>
@@ -8642,19 +8648,19 @@
           <p:cNvPr id="19" name="">
             <a:extLst xmlns:a="http://schemas.openxmlformats.org/drawingml/2006/main">
               <a:ext uri="{FF2B5EF4-FFF2-40B4-BE49-F238E27FC236}">
-                <a16:creationId xmlns:a16="http://schemas.microsoft.com/office/drawing/2014/main" id="{3E2315B2-6045-42DF-A729-0EC4828689C7}"/>
-              </a:ext>
-            </a:extLst>
-          </p:cNvPr>
-          <p:cNvSpPr>
-            <a:spLocks xmlns:a="http://schemas.openxmlformats.org/drawingml/2006/main" noGrp="1"/>
-          </p:cNvSpPr>
-          <p:nvPr/>
-        </p:nvSpPr>
-        <p:spPr>
-          <a:xfrm xmlns:a="http://schemas.openxmlformats.org/drawingml/2006/main">
-            <a:off x="1714500" y="3667125"/>
-            <a:ext cx="9429750" cy="609600"/>
+                <a16:creationId xmlns:a16="http://schemas.microsoft.com/office/drawing/2014/main" id="{10AAB5A7-259E-44C5-BD06-E66005732F95}"/>
+              </a:ext>
+            </a:extLst>
+          </p:cNvPr>
+          <p:cNvSpPr>
+            <a:spLocks xmlns:a="http://schemas.openxmlformats.org/drawingml/2006/main" noGrp="1"/>
+          </p:cNvSpPr>
+          <p:nvPr/>
+        </p:nvSpPr>
+        <p:spPr>
+          <a:xfrm xmlns:a="http://schemas.openxmlformats.org/drawingml/2006/main">
+            <a:off x="1714500" y="3524250"/>
+            <a:ext cx="9525000" cy="638175"/>
           </a:xfrm>
           <a:prstGeom xmlns:a="http://schemas.openxmlformats.org/drawingml/2006/main" prst="rect">
             <a:avLst/>
@@ -8671,7 +8677,7 @@
           <a:lstStyle xmlns:a="http://schemas.openxmlformats.org/drawingml/2006/main"/>
           <a:p xmlns:a="http://schemas.openxmlformats.org/drawingml/2006/main">
             <a:pPr algn="l">
-              <a:defRPr sz="1500" b="0">
+              <a:defRPr sz="1575" b="0">
                 <a:solidFill>
                   <a:srgbClr val="17253A"/>
                 </a:solidFill>
@@ -8681,7 +8687,7 @@
               </a:defRPr>
             </a:pPr>
             <a:r>
-              <a:rPr sz="1500" b="0">
+              <a:rPr sz="1575" b="0">
                 <a:solidFill>
                   <a:srgbClr val="17253A"/>
                 </a:solidFill>
@@ -8689,7 +8695,7 @@
                 <a:ea typeface="Arial"/>
                 <a:cs typeface="Arial"/>
               </a:rPr>
-              <a:t>Complete the calculation: 735,677.</a:t>
+              <a:t>500,000 + 235,678 = 735,678</a:t>
             </a:r>
           </a:p>
         </p:txBody>
@@ -8699,28 +8705,30 @@
           <p:cNvPr id="20" name="">
             <a:extLst xmlns:a="http://schemas.openxmlformats.org/drawingml/2006/main">
               <a:ext uri="{FF2B5EF4-FFF2-40B4-BE49-F238E27FC236}">
-                <a16:creationId xmlns:a16="http://schemas.microsoft.com/office/drawing/2014/main" id="{81AEAEE0-DEF4-44BB-BC17-41CB93F30D16}"/>
-              </a:ext>
-            </a:extLst>
-          </p:cNvPr>
-          <p:cNvSpPr>
-            <a:spLocks xmlns:a="http://schemas.openxmlformats.org/drawingml/2006/main" noGrp="1"/>
-          </p:cNvSpPr>
-          <p:nvPr/>
-        </p:nvSpPr>
-        <p:spPr>
-          <a:xfrm xmlns:a="http://schemas.openxmlformats.org/drawingml/2006/main">
-            <a:off x="1000125" y="4476750"/>
-            <a:ext cx="476250" cy="476250"/>
-          </a:xfrm>
-          <a:prstGeom xmlns:a="http://schemas.openxmlformats.org/drawingml/2006/main" prst="ellipse">
+                <a16:creationId xmlns:a16="http://schemas.microsoft.com/office/drawing/2014/main" id="{F87ADC1F-B012-4062-8802-5B3481B4675D}"/>
+              </a:ext>
+            </a:extLst>
+          </p:cNvPr>
+          <p:cNvSpPr>
+            <a:spLocks xmlns:a="http://schemas.openxmlformats.org/drawingml/2006/main" noGrp="1"/>
+          </p:cNvSpPr>
+          <p:nvPr/>
+        </p:nvSpPr>
+        <p:spPr>
+          <a:xfrm xmlns:a="http://schemas.openxmlformats.org/drawingml/2006/main">
+            <a:off x="1714500" y="4181475"/>
+            <a:ext cx="9334500" cy="9525"/>
+          </a:xfrm>
+          <a:prstGeom xmlns:a="http://schemas.openxmlformats.org/drawingml/2006/main" prst="rect">
             <a:avLst/>
           </a:prstGeom>
           <a:solidFill xmlns:a="http://schemas.openxmlformats.org/drawingml/2006/main">
-            <a:srgbClr val="2C6E73"/>
+            <a:srgbClr val="D9E0E6"/>
           </a:solidFill>
           <a:ln xmlns:a="http://schemas.openxmlformats.org/drawingml/2006/main" w="0">
-            <a:noFill/>
+            <a:solidFill>
+              <a:srgbClr val="D9E0E6"/>
+            </a:solidFill>
           </a:ln>
         </p:spPr>
       </p:sp>
@@ -8729,19 +8737,19 @@
           <p:cNvPr id="21" name="">
             <a:extLst xmlns:a="http://schemas.openxmlformats.org/drawingml/2006/main">
               <a:ext uri="{FF2B5EF4-FFF2-40B4-BE49-F238E27FC236}">
-                <a16:creationId xmlns:a16="http://schemas.microsoft.com/office/drawing/2014/main" id="{7D76574F-246A-4972-8EF7-2BBAD5073D86}"/>
-              </a:ext>
-            </a:extLst>
-          </p:cNvPr>
-          <p:cNvSpPr>
-            <a:spLocks xmlns:a="http://schemas.openxmlformats.org/drawingml/2006/main" noGrp="1"/>
-          </p:cNvSpPr>
-          <p:nvPr/>
-        </p:nvSpPr>
-        <p:spPr>
-          <a:xfrm xmlns:a="http://schemas.openxmlformats.org/drawingml/2006/main">
-            <a:off x="1000125" y="4505325"/>
-            <a:ext cx="476250" cy="419100"/>
+                <a16:creationId xmlns:a16="http://schemas.microsoft.com/office/drawing/2014/main" id="{E6BD6CD9-F523-4679-926D-85867AB26DDC}"/>
+              </a:ext>
+            </a:extLst>
+          </p:cNvPr>
+          <p:cNvSpPr>
+            <a:spLocks xmlns:a="http://schemas.openxmlformats.org/drawingml/2006/main" noGrp="1"/>
+          </p:cNvSpPr>
+          <p:nvPr/>
+        </p:nvSpPr>
+        <p:spPr>
+          <a:xfrm xmlns:a="http://schemas.openxmlformats.org/drawingml/2006/main">
+            <a:off x="1162050" y="4314825"/>
+            <a:ext cx="400050" cy="400050"/>
           </a:xfrm>
           <a:prstGeom xmlns:a="http://schemas.openxmlformats.org/drawingml/2006/main" prst="rect">
             <a:avLst/>
@@ -8758,9 +8766,9 @@
           <a:lstStyle xmlns:a="http://schemas.openxmlformats.org/drawingml/2006/main"/>
           <a:p xmlns:a="http://schemas.openxmlformats.org/drawingml/2006/main">
             <a:pPr algn="ctr">
-              <a:defRPr sz="1350" b="1">
-                <a:solidFill>
-                  <a:srgbClr val="FFFFFF"/>
+              <a:defRPr sz="1125" b="1">
+                <a:solidFill>
+                  <a:srgbClr val="2C6E73"/>
                 </a:solidFill>
                 <a:latin typeface="Arial"/>
                 <a:ea typeface="Arial"/>
@@ -8768,9 +8776,9 @@
               </a:defRPr>
             </a:pPr>
             <a:r>
-              <a:rPr sz="1350" b="1">
-                <a:solidFill>
-                  <a:srgbClr val="FFFFFF"/>
+              <a:rPr sz="1125" b="1">
+                <a:solidFill>
+                  <a:srgbClr val="2C6E73"/>
                 </a:solidFill>
                 <a:latin typeface="Arial"/>
                 <a:ea typeface="Arial"/>
@@ -8786,19 +8794,19 @@
           <p:cNvPr id="22" name="">
             <a:extLst xmlns:a="http://schemas.openxmlformats.org/drawingml/2006/main">
               <a:ext uri="{FF2B5EF4-FFF2-40B4-BE49-F238E27FC236}">
-                <a16:creationId xmlns:a16="http://schemas.microsoft.com/office/drawing/2014/main" id="{C6E6F156-6A69-489C-B3C7-F09233723BC5}"/>
-              </a:ext>
-            </a:extLst>
-          </p:cNvPr>
-          <p:cNvSpPr>
-            <a:spLocks xmlns:a="http://schemas.openxmlformats.org/drawingml/2006/main" noGrp="1"/>
-          </p:cNvSpPr>
-          <p:nvPr/>
-        </p:nvSpPr>
-        <p:spPr>
-          <a:xfrm xmlns:a="http://schemas.openxmlformats.org/drawingml/2006/main">
-            <a:off x="1714500" y="4410075"/>
-            <a:ext cx="9429750" cy="609600"/>
+                <a16:creationId xmlns:a16="http://schemas.microsoft.com/office/drawing/2014/main" id="{74457CCF-2B17-484C-A77C-47166B957976}"/>
+              </a:ext>
+            </a:extLst>
+          </p:cNvPr>
+          <p:cNvSpPr>
+            <a:spLocks xmlns:a="http://schemas.openxmlformats.org/drawingml/2006/main" noGrp="1"/>
+          </p:cNvSpPr>
+          <p:nvPr/>
+        </p:nvSpPr>
+        <p:spPr>
+          <a:xfrm xmlns:a="http://schemas.openxmlformats.org/drawingml/2006/main">
+            <a:off x="1714500" y="4229100"/>
+            <a:ext cx="9525000" cy="638175"/>
           </a:xfrm>
           <a:prstGeom xmlns:a="http://schemas.openxmlformats.org/drawingml/2006/main" prst="rect">
             <a:avLst/>
@@ -8815,9 +8823,9 @@
           <a:lstStyle xmlns:a="http://schemas.openxmlformats.org/drawingml/2006/main"/>
           <a:p xmlns:a="http://schemas.openxmlformats.org/drawingml/2006/main">
             <a:pPr algn="l">
-              <a:defRPr sz="1500" b="1">
-                <a:solidFill>
-                  <a:srgbClr val="2F785D"/>
+              <a:defRPr sz="1575" b="0">
+                <a:solidFill>
+                  <a:srgbClr val="17253A"/>
                 </a:solidFill>
                 <a:latin typeface="Arial"/>
                 <a:ea typeface="Arial"/>
@@ -8825,15 +8833,161 @@
               </a:defRPr>
             </a:pPr>
             <a:r>
-              <a:rPr sz="1500" b="1">
+              <a:rPr sz="1575" b="0">
+                <a:solidFill>
+                  <a:srgbClr val="17253A"/>
+                </a:solidFill>
+                <a:latin typeface="Arial"/>
+                <a:ea typeface="Arial"/>
+                <a:cs typeface="Arial"/>
+              </a:rPr>
+              <a:t>Compensate: 735,678 - 1</a:t>
+            </a:r>
+          </a:p>
+        </p:txBody>
+      </p:sp>
+      <p:sp>
+        <p:nvSpPr>
+          <p:cNvPr id="23" name="">
+            <a:extLst xmlns:a="http://schemas.openxmlformats.org/drawingml/2006/main">
+              <a:ext uri="{FF2B5EF4-FFF2-40B4-BE49-F238E27FC236}">
+                <a16:creationId xmlns:a16="http://schemas.microsoft.com/office/drawing/2014/main" id="{58D5556C-E7C8-4A0F-B421-5B252BD80EB5}"/>
+              </a:ext>
+            </a:extLst>
+          </p:cNvPr>
+          <p:cNvSpPr>
+            <a:spLocks xmlns:a="http://schemas.openxmlformats.org/drawingml/2006/main" noGrp="1"/>
+          </p:cNvSpPr>
+          <p:nvPr/>
+        </p:nvSpPr>
+        <p:spPr>
+          <a:xfrm xmlns:a="http://schemas.openxmlformats.org/drawingml/2006/main">
+            <a:off x="1714500" y="4886325"/>
+            <a:ext cx="9334500" cy="9525"/>
+          </a:xfrm>
+          <a:prstGeom xmlns:a="http://schemas.openxmlformats.org/drawingml/2006/main" prst="rect">
+            <a:avLst/>
+          </a:prstGeom>
+          <a:solidFill xmlns:a="http://schemas.openxmlformats.org/drawingml/2006/main">
+            <a:srgbClr val="D9E0E6"/>
+          </a:solidFill>
+          <a:ln xmlns:a="http://schemas.openxmlformats.org/drawingml/2006/main" w="0">
+            <a:solidFill>
+              <a:srgbClr val="D9E0E6"/>
+            </a:solidFill>
+          </a:ln>
+        </p:spPr>
+      </p:sp>
+      <p:sp>
+        <p:nvSpPr>
+          <p:cNvPr id="24" name="">
+            <a:extLst xmlns:a="http://schemas.openxmlformats.org/drawingml/2006/main">
+              <a:ext uri="{FF2B5EF4-FFF2-40B4-BE49-F238E27FC236}">
+                <a16:creationId xmlns:a16="http://schemas.microsoft.com/office/drawing/2014/main" id="{8F52D96E-88CC-416E-A33E-C498F584CD20}"/>
+              </a:ext>
+            </a:extLst>
+          </p:cNvPr>
+          <p:cNvSpPr>
+            <a:spLocks xmlns:a="http://schemas.openxmlformats.org/drawingml/2006/main" noGrp="1"/>
+          </p:cNvSpPr>
+          <p:nvPr/>
+        </p:nvSpPr>
+        <p:spPr>
+          <a:xfrm xmlns:a="http://schemas.openxmlformats.org/drawingml/2006/main">
+            <a:off x="1162050" y="5019675"/>
+            <a:ext cx="400050" cy="400050"/>
+          </a:xfrm>
+          <a:prstGeom xmlns:a="http://schemas.openxmlformats.org/drawingml/2006/main" prst="rect">
+            <a:avLst/>
+          </a:prstGeom>
+          <a:noFill xmlns:a="http://schemas.openxmlformats.org/drawingml/2006/main"/>
+          <a:ln xmlns:a="http://schemas.openxmlformats.org/drawingml/2006/main" w="0">
+            <a:noFill/>
+          </a:ln>
+        </p:spPr>
+        <p:txBody>
+          <a:bodyPr xmlns:a="http://schemas.openxmlformats.org/drawingml/2006/main" anchor="ctr">
+            <a:normAutofit fontScale="100000"/>
+          </a:bodyPr>
+          <a:lstStyle xmlns:a="http://schemas.openxmlformats.org/drawingml/2006/main"/>
+          <a:p xmlns:a="http://schemas.openxmlformats.org/drawingml/2006/main">
+            <a:pPr algn="ctr">
+              <a:defRPr sz="1125" b="1">
                 <a:solidFill>
                   <a:srgbClr val="2F785D"/>
                 </a:solidFill>
                 <a:latin typeface="Arial"/>
                 <a:ea typeface="Arial"/>
                 <a:cs typeface="Arial"/>
+              </a:defRPr>
+            </a:pPr>
+            <a:r>
+              <a:rPr sz="1125" b="1">
+                <a:solidFill>
+                  <a:srgbClr val="2F785D"/>
+                </a:solidFill>
+                <a:latin typeface="Arial"/>
+                <a:ea typeface="Arial"/>
+                <a:cs typeface="Arial"/>
               </a:rPr>
-              <a:t>Check the result: Check the size of the result using estimation or an inverse operation.</a:t>
+              <a:t>5</a:t>
+            </a:r>
+          </a:p>
+        </p:txBody>
+      </p:sp>
+      <p:sp>
+        <p:nvSpPr>
+          <p:cNvPr id="25" name="">
+            <a:extLst xmlns:a="http://schemas.openxmlformats.org/drawingml/2006/main">
+              <a:ext uri="{FF2B5EF4-FFF2-40B4-BE49-F238E27FC236}">
+                <a16:creationId xmlns:a16="http://schemas.microsoft.com/office/drawing/2014/main" id="{325DCC54-CB3C-4E61-9DB3-D665BCC05CE3}"/>
+              </a:ext>
+            </a:extLst>
+          </p:cNvPr>
+          <p:cNvSpPr>
+            <a:spLocks xmlns:a="http://schemas.openxmlformats.org/drawingml/2006/main" noGrp="1"/>
+          </p:cNvSpPr>
+          <p:nvPr/>
+        </p:nvSpPr>
+        <p:spPr>
+          <a:xfrm xmlns:a="http://schemas.openxmlformats.org/drawingml/2006/main">
+            <a:off x="1714500" y="4933950"/>
+            <a:ext cx="9525000" cy="638175"/>
+          </a:xfrm>
+          <a:prstGeom xmlns:a="http://schemas.openxmlformats.org/drawingml/2006/main" prst="rect">
+            <a:avLst/>
+          </a:prstGeom>
+          <a:noFill xmlns:a="http://schemas.openxmlformats.org/drawingml/2006/main"/>
+          <a:ln xmlns:a="http://schemas.openxmlformats.org/drawingml/2006/main" w="0">
+            <a:noFill/>
+          </a:ln>
+        </p:spPr>
+        <p:txBody>
+          <a:bodyPr xmlns:a="http://schemas.openxmlformats.org/drawingml/2006/main" anchor="ctr">
+            <a:normAutofit fontScale="100000"/>
+          </a:bodyPr>
+          <a:lstStyle xmlns:a="http://schemas.openxmlformats.org/drawingml/2006/main"/>
+          <a:p xmlns:a="http://schemas.openxmlformats.org/drawingml/2006/main">
+            <a:pPr algn="l">
+              <a:defRPr sz="1575" b="1">
+                <a:solidFill>
+                  <a:srgbClr val="2F785D"/>
+                </a:solidFill>
+                <a:latin typeface="Arial"/>
+                <a:ea typeface="Arial"/>
+                <a:cs typeface="Arial"/>
+              </a:defRPr>
+            </a:pPr>
+            <a:r>
+              <a:rPr sz="1575" b="1">
+                <a:solidFill>
+                  <a:srgbClr val="2F785D"/>
+                </a:solidFill>
+                <a:latin typeface="Arial"/>
+                <a:ea typeface="Arial"/>
+                <a:cs typeface="Arial"/>
+              </a:rPr>
+              <a:t>735,677</a:t>
             </a:r>
           </a:p>
         </p:txBody>
@@ -8841,7 +8995,7 @@
     </p:spTree>
     <p:extLst>
       <p:ext uri="{BB962C8B-B14F-4D97-AF65-F5344CB8AC3E}">
-        <p14:creationId xmlns:p14="http://schemas.microsoft.com/office/powerpoint/2010/main" val="1792512961"/>
+        <p14:creationId xmlns:p14="http://schemas.microsoft.com/office/powerpoint/2010/main" val="1582021585"/>
       </p:ext>
     </p:extLst>
   </p:cSld>
@@ -9078,6 +9232,51 @@
                       </p:childTnLst>
                     </p:cTn>
                   </p:par>
+                  <p:par>
+                    <p:cTn id="23" fill="hold">
+                      <p:stCondLst>
+                        <p:cond delay="indefinite"/>
+                      </p:stCondLst>
+                      <p:childTnLst>
+                        <p:par>
+                          <p:cTn id="24" fill="hold">
+                            <p:stCondLst>
+                              <p:cond delay="0"/>
+                            </p:stCondLst>
+                            <p:childTnLst>
+                              <p:par>
+                                <p:cTn id="25" presetID="1" presetClass="entr" presetSubtype="0" fill="hold" grpId="0" nodeType="clickEffect">
+                                  <p:stCondLst>
+                                    <p:cond delay="0"/>
+                                  </p:stCondLst>
+                                  <p:childTnLst>
+                                    <p:set>
+                                      <p:cBhvr>
+                                        <p:cTn id="26" dur="1" fill="hold">
+                                          <p:stCondLst>
+                                            <p:cond delay="0"/>
+                                          </p:stCondLst>
+                                        </p:cTn>
+                                        <p:tgtEl>
+                                          <p:spTgt spid="25"/>
+                                        </p:tgtEl>
+                                        <p:attrNameLst>
+                                          <p:attrName>style.visibility</p:attrName>
+                                        </p:attrNameLst>
+                                      </p:cBhvr>
+                                      <p:to>
+                                        <p:strVal val="visible"/>
+                                      </p:to>
+                                    </p:set>
+                                  </p:childTnLst>
+                                </p:cTn>
+                              </p:par>
+                            </p:childTnLst>
+                          </p:cTn>
+                        </p:par>
+                      </p:childTnLst>
+                    </p:cTn>
+                  </p:par>
                 </p:childTnLst>
               </p:cTn>
               <p:prevCondLst>
@@ -9105,6 +9304,7 @@
       <p:bldP spid="16" grpId="0"/>
       <p:bldP spid="19" grpId="0"/>
       <p:bldP spid="22" grpId="0"/>
+      <p:bldP spid="25" grpId="0"/>
     </p:bldLst>
   </p:timing>
 </p:sld>
@@ -9134,7 +9334,7 @@
           <p:cNvPr id="15" name="">
             <a:extLst xmlns:a="http://schemas.openxmlformats.org/drawingml/2006/main">
               <a:ext uri="{FF2B5EF4-FFF2-40B4-BE49-F238E27FC236}">
-                <a16:creationId xmlns:a16="http://schemas.microsoft.com/office/drawing/2014/main" id="{1F59178B-E428-493B-91D9-906C48E0A304}"/>
+                <a16:creationId xmlns:a16="http://schemas.microsoft.com/office/drawing/2014/main" id="{227B117F-F8EA-4E16-BE2E-59767CE2503F}"/>
               </a:ext>
             </a:extLst>
           </p:cNvPr>
@@ -9166,7 +9366,7 @@
           <p:cNvPr id="2" name="">
             <a:extLst xmlns:a="http://schemas.openxmlformats.org/drawingml/2006/main">
               <a:ext uri="{FF2B5EF4-FFF2-40B4-BE49-F238E27FC236}">
-                <a16:creationId xmlns:a16="http://schemas.microsoft.com/office/drawing/2014/main" id="{BBDCF59D-8F79-4B5E-A6B7-E843332B9113}"/>
+                <a16:creationId xmlns:a16="http://schemas.microsoft.com/office/drawing/2014/main" id="{3B925ACC-1F10-493D-8D6B-16EDA1C5436D}"/>
               </a:ext>
             </a:extLst>
           </p:cNvPr>
@@ -9223,7 +9423,7 @@
           <p:cNvPr id="3" name="">
             <a:extLst xmlns:a="http://schemas.openxmlformats.org/drawingml/2006/main">
               <a:ext uri="{FF2B5EF4-FFF2-40B4-BE49-F238E27FC236}">
-                <a16:creationId xmlns:a16="http://schemas.microsoft.com/office/drawing/2014/main" id="{21FBC494-4659-4E95-9512-75AA5238CD1D}"/>
+                <a16:creationId xmlns:a16="http://schemas.microsoft.com/office/drawing/2014/main" id="{3F6B56F1-A8D9-4174-8181-436A64496AFA}"/>
               </a:ext>
             </a:extLst>
           </p:cNvPr>
@@ -9255,7 +9455,7 @@
           <p:cNvPr id="4" name="">
             <a:extLst xmlns:a="http://schemas.openxmlformats.org/drawingml/2006/main">
               <a:ext uri="{FF2B5EF4-FFF2-40B4-BE49-F238E27FC236}">
-                <a16:creationId xmlns:a16="http://schemas.microsoft.com/office/drawing/2014/main" id="{D6EFCFEF-8958-461E-96BD-78583B8E276F}"/>
+                <a16:creationId xmlns:a16="http://schemas.microsoft.com/office/drawing/2014/main" id="{CC91DC5F-A65F-4BBF-95A5-29B7EE2D551F}"/>
               </a:ext>
             </a:extLst>
           </p:cNvPr>
@@ -9312,7 +9512,7 @@
           <p:cNvPr id="5" name="">
             <a:extLst xmlns:a="http://schemas.openxmlformats.org/drawingml/2006/main">
               <a:ext uri="{FF2B5EF4-FFF2-40B4-BE49-F238E27FC236}">
-                <a16:creationId xmlns:a16="http://schemas.microsoft.com/office/drawing/2014/main" id="{CA5B6051-4DDB-408E-9224-D615452BB0C4}"/>
+                <a16:creationId xmlns:a16="http://schemas.microsoft.com/office/drawing/2014/main" id="{1CB8364C-69BB-4CC1-A645-38F0207E2C9A}"/>
               </a:ext>
             </a:extLst>
           </p:cNvPr>
@@ -9369,7 +9569,7 @@
           <p:cNvPr id="6" name="">
             <a:extLst xmlns:a="http://schemas.openxmlformats.org/drawingml/2006/main">
               <a:ext uri="{FF2B5EF4-FFF2-40B4-BE49-F238E27FC236}">
-                <a16:creationId xmlns:a16="http://schemas.microsoft.com/office/drawing/2014/main" id="{9874DBBE-25E3-42A7-821B-98BE31B85393}"/>
+                <a16:creationId xmlns:a16="http://schemas.microsoft.com/office/drawing/2014/main" id="{07CFA3A1-D496-44D0-96A0-0770A1699213}"/>
               </a:ext>
             </a:extLst>
           </p:cNvPr>
@@ -9426,7 +9626,7 @@
           <p:cNvPr id="7" name="">
             <a:extLst xmlns:a="http://schemas.openxmlformats.org/drawingml/2006/main">
               <a:ext uri="{FF2B5EF4-FFF2-40B4-BE49-F238E27FC236}">
-                <a16:creationId xmlns:a16="http://schemas.microsoft.com/office/drawing/2014/main" id="{685B1F59-A87F-4D09-8077-0279EBCD4968}"/>
+                <a16:creationId xmlns:a16="http://schemas.microsoft.com/office/drawing/2014/main" id="{1F664BD2-1B4E-4C3D-950A-99E4CA892228}"/>
               </a:ext>
             </a:extLst>
           </p:cNvPr>
@@ -9458,7 +9658,7 @@
           <p:cNvPr id="8" name="">
             <a:extLst xmlns:a="http://schemas.openxmlformats.org/drawingml/2006/main">
               <a:ext uri="{FF2B5EF4-FFF2-40B4-BE49-F238E27FC236}">
-                <a16:creationId xmlns:a16="http://schemas.microsoft.com/office/drawing/2014/main" id="{BF03DC2D-29DD-4870-B9A8-7A89BFF66130}"/>
+                <a16:creationId xmlns:a16="http://schemas.microsoft.com/office/drawing/2014/main" id="{4DCEB2FD-D683-4FF5-99EB-49258C46F8DB}"/>
               </a:ext>
             </a:extLst>
           </p:cNvPr>
@@ -9515,7 +9715,7 @@
           <p:cNvPr id="9" name="">
             <a:extLst xmlns:a="http://schemas.openxmlformats.org/drawingml/2006/main">
               <a:ext uri="{FF2B5EF4-FFF2-40B4-BE49-F238E27FC236}">
-                <a16:creationId xmlns:a16="http://schemas.microsoft.com/office/drawing/2014/main" id="{9B3F3749-7C59-4639-854A-C7634B600E0C}"/>
+                <a16:creationId xmlns:a16="http://schemas.microsoft.com/office/drawing/2014/main" id="{A86F4256-E8EE-4020-ADCF-3D191B310362}"/>
               </a:ext>
             </a:extLst>
           </p:cNvPr>
@@ -9572,7 +9772,7 @@
           <p:cNvPr id="10" name="">
             <a:extLst xmlns:a="http://schemas.openxmlformats.org/drawingml/2006/main">
               <a:ext uri="{FF2B5EF4-FFF2-40B4-BE49-F238E27FC236}">
-                <a16:creationId xmlns:a16="http://schemas.microsoft.com/office/drawing/2014/main" id="{6CABC3E6-11A3-40DF-ADE3-892136F8EAAA}"/>
+                <a16:creationId xmlns:a16="http://schemas.microsoft.com/office/drawing/2014/main" id="{9D134602-0FD4-4E75-81E6-82287BDB5C02}"/>
               </a:ext>
             </a:extLst>
           </p:cNvPr>
@@ -9629,7 +9829,7 @@
           <p:cNvPr id="11" name="">
             <a:extLst xmlns:a="http://schemas.openxmlformats.org/drawingml/2006/main">
               <a:ext uri="{FF2B5EF4-FFF2-40B4-BE49-F238E27FC236}">
-                <a16:creationId xmlns:a16="http://schemas.microsoft.com/office/drawing/2014/main" id="{735CB172-2F88-456B-9FB5-C6309AD64B86}"/>
+                <a16:creationId xmlns:a16="http://schemas.microsoft.com/office/drawing/2014/main" id="{DB7C9AF6-6220-45C1-9539-D7FF413A3926}"/>
               </a:ext>
             </a:extLst>
           </p:cNvPr>
@@ -9686,7 +9886,7 @@
           <p:cNvPr id="12" name="">
             <a:extLst xmlns:a="http://schemas.openxmlformats.org/drawingml/2006/main">
               <a:ext uri="{FF2B5EF4-FFF2-40B4-BE49-F238E27FC236}">
-                <a16:creationId xmlns:a16="http://schemas.microsoft.com/office/drawing/2014/main" id="{04FA46BA-EF99-436C-BACC-8B2090C6B70D}"/>
+                <a16:creationId xmlns:a16="http://schemas.microsoft.com/office/drawing/2014/main" id="{758F40AF-D858-47AF-9EDF-778FF261644E}"/>
               </a:ext>
             </a:extLst>
           </p:cNvPr>
@@ -9718,7 +9918,7 @@
           <p:cNvPr id="13" name="">
             <a:extLst xmlns:a="http://schemas.openxmlformats.org/drawingml/2006/main">
               <a:ext uri="{FF2B5EF4-FFF2-40B4-BE49-F238E27FC236}">
-                <a16:creationId xmlns:a16="http://schemas.microsoft.com/office/drawing/2014/main" id="{02EE56E1-0470-4213-9EE6-9FEBD3E01F75}"/>
+                <a16:creationId xmlns:a16="http://schemas.microsoft.com/office/drawing/2014/main" id="{47A60C0C-CF1C-4D6E-8515-D3FDF5A83EA8}"/>
               </a:ext>
             </a:extLst>
           </p:cNvPr>
@@ -9775,7 +9975,7 @@
           <p:cNvPr id="14" name="">
             <a:extLst xmlns:a="http://schemas.openxmlformats.org/drawingml/2006/main">
               <a:ext uri="{FF2B5EF4-FFF2-40B4-BE49-F238E27FC236}">
-                <a16:creationId xmlns:a16="http://schemas.microsoft.com/office/drawing/2014/main" id="{FF6108DC-10CB-4DF8-BB50-DD6820786D4B}"/>
+                <a16:creationId xmlns:a16="http://schemas.microsoft.com/office/drawing/2014/main" id="{03E4F642-1225-481D-B1D9-DA83E0C80C9E}"/>
               </a:ext>
             </a:extLst>
           </p:cNvPr>
@@ -9830,7 +10030,7 @@
     </p:spTree>
     <p:extLst>
       <p:ext uri="{BB962C8B-B14F-4D97-AF65-F5344CB8AC3E}">
-        <p14:creationId xmlns:p14="http://schemas.microsoft.com/office/powerpoint/2010/main" val="243550806"/>
+        <p14:creationId xmlns:p14="http://schemas.microsoft.com/office/powerpoint/2010/main" val="500249831"/>
       </p:ext>
     </p:extLst>
   </p:cSld>
@@ -10031,7 +10231,7 @@
           <p:cNvPr id="16" name="">
             <a:extLst xmlns:a="http://schemas.openxmlformats.org/drawingml/2006/main">
               <a:ext uri="{FF2B5EF4-FFF2-40B4-BE49-F238E27FC236}">
-                <a16:creationId xmlns:a16="http://schemas.microsoft.com/office/drawing/2014/main" id="{A7CF4C13-D443-423C-9D34-7EE6DB54ABCD}"/>
+                <a16:creationId xmlns:a16="http://schemas.microsoft.com/office/drawing/2014/main" id="{09E84384-8E37-4A9D-A7B8-1220BAA3751F}"/>
               </a:ext>
             </a:extLst>
           </p:cNvPr>
@@ -10063,7 +10263,7 @@
           <p:cNvPr id="2" name="">
             <a:extLst xmlns:a="http://schemas.openxmlformats.org/drawingml/2006/main">
               <a:ext uri="{FF2B5EF4-FFF2-40B4-BE49-F238E27FC236}">
-                <a16:creationId xmlns:a16="http://schemas.microsoft.com/office/drawing/2014/main" id="{09DDC387-BF15-46C2-AC05-4D993E2E08B4}"/>
+                <a16:creationId xmlns:a16="http://schemas.microsoft.com/office/drawing/2014/main" id="{F4E2C448-6FA7-422F-919C-4A9454E6B5C6}"/>
               </a:ext>
             </a:extLst>
           </p:cNvPr>
@@ -10120,7 +10320,7 @@
           <p:cNvPr id="3" name="">
             <a:extLst xmlns:a="http://schemas.openxmlformats.org/drawingml/2006/main">
               <a:ext uri="{FF2B5EF4-FFF2-40B4-BE49-F238E27FC236}">
-                <a16:creationId xmlns:a16="http://schemas.microsoft.com/office/drawing/2014/main" id="{65F8C618-0AD9-47AB-931E-E74D0B4803D0}"/>
+                <a16:creationId xmlns:a16="http://schemas.microsoft.com/office/drawing/2014/main" id="{D7F95A5A-601F-4C2A-853C-DFB62B21BE56}"/>
               </a:ext>
             </a:extLst>
           </p:cNvPr>
@@ -10152,7 +10352,7 @@
           <p:cNvPr id="4" name="">
             <a:extLst xmlns:a="http://schemas.openxmlformats.org/drawingml/2006/main">
               <a:ext uri="{FF2B5EF4-FFF2-40B4-BE49-F238E27FC236}">
-                <a16:creationId xmlns:a16="http://schemas.microsoft.com/office/drawing/2014/main" id="{A87039A6-2090-4B87-AEE1-97FE8AFC6438}"/>
+                <a16:creationId xmlns:a16="http://schemas.microsoft.com/office/drawing/2014/main" id="{871A4F43-A127-4F45-B24B-CE4DA86EC325}"/>
               </a:ext>
             </a:extLst>
           </p:cNvPr>
@@ -10209,7 +10409,7 @@
           <p:cNvPr id="5" name="">
             <a:extLst xmlns:a="http://schemas.openxmlformats.org/drawingml/2006/main">
               <a:ext uri="{FF2B5EF4-FFF2-40B4-BE49-F238E27FC236}">
-                <a16:creationId xmlns:a16="http://schemas.microsoft.com/office/drawing/2014/main" id="{5D741AE8-1AC9-49E9-B869-F871188FC1C1}"/>
+                <a16:creationId xmlns:a16="http://schemas.microsoft.com/office/drawing/2014/main" id="{7558C78F-AA4E-46FA-88BE-B52FDA656A7A}"/>
               </a:ext>
             </a:extLst>
           </p:cNvPr>
@@ -10266,7 +10466,7 @@
           <p:cNvPr id="6" name="">
             <a:extLst xmlns:a="http://schemas.openxmlformats.org/drawingml/2006/main">
               <a:ext uri="{FF2B5EF4-FFF2-40B4-BE49-F238E27FC236}">
-                <a16:creationId xmlns:a16="http://schemas.microsoft.com/office/drawing/2014/main" id="{D8B98B34-4291-4218-AFC5-BF1606422F1A}"/>
+                <a16:creationId xmlns:a16="http://schemas.microsoft.com/office/drawing/2014/main" id="{43772A0A-4FE0-4CFF-A968-EFE6BF9F1762}"/>
               </a:ext>
             </a:extLst>
           </p:cNvPr>
@@ -10323,7 +10523,7 @@
           <p:cNvPr id="7" name="">
             <a:extLst xmlns:a="http://schemas.openxmlformats.org/drawingml/2006/main">
               <a:ext uri="{FF2B5EF4-FFF2-40B4-BE49-F238E27FC236}">
-                <a16:creationId xmlns:a16="http://schemas.microsoft.com/office/drawing/2014/main" id="{D4A66932-337D-4BD7-8B9A-AAC9358D3AF8}"/>
+                <a16:creationId xmlns:a16="http://schemas.microsoft.com/office/drawing/2014/main" id="{7573D07C-D2A9-441C-A028-C43A269B0FB2}"/>
               </a:ext>
             </a:extLst>
           </p:cNvPr>
@@ -10355,7 +10555,7 @@
           <p:cNvPr id="8" name="">
             <a:extLst xmlns:a="http://schemas.openxmlformats.org/drawingml/2006/main">
               <a:ext uri="{FF2B5EF4-FFF2-40B4-BE49-F238E27FC236}">
-                <a16:creationId xmlns:a16="http://schemas.microsoft.com/office/drawing/2014/main" id="{4228A206-5244-4769-BC10-8B2DFCD5FD22}"/>
+                <a16:creationId xmlns:a16="http://schemas.microsoft.com/office/drawing/2014/main" id="{F692DB6C-DF04-4809-9B82-23D16CAA25BD}"/>
               </a:ext>
             </a:extLst>
           </p:cNvPr>
@@ -10412,7 +10612,7 @@
           <p:cNvPr id="9" name="">
             <a:extLst xmlns:a="http://schemas.openxmlformats.org/drawingml/2006/main">
               <a:ext uri="{FF2B5EF4-FFF2-40B4-BE49-F238E27FC236}">
-                <a16:creationId xmlns:a16="http://schemas.microsoft.com/office/drawing/2014/main" id="{14F0DAAF-5053-48B4-AD1C-C91D9614DC0A}"/>
+                <a16:creationId xmlns:a16="http://schemas.microsoft.com/office/drawing/2014/main" id="{929577B8-C9A1-4087-B4C9-6B04FCC72D86}"/>
               </a:ext>
             </a:extLst>
           </p:cNvPr>
@@ -10469,7 +10669,7 @@
           <p:cNvPr id="10" name="">
             <a:extLst xmlns:a="http://schemas.openxmlformats.org/drawingml/2006/main">
               <a:ext uri="{FF2B5EF4-FFF2-40B4-BE49-F238E27FC236}">
-                <a16:creationId xmlns:a16="http://schemas.microsoft.com/office/drawing/2014/main" id="{9BF24C73-7660-46CF-982F-33576EE5D1A2}"/>
+                <a16:creationId xmlns:a16="http://schemas.microsoft.com/office/drawing/2014/main" id="{AC5BF741-E9A8-4805-9749-C37F2BB8A4B7}"/>
               </a:ext>
             </a:extLst>
           </p:cNvPr>
@@ -10526,7 +10726,7 @@
           <p:cNvPr id="11" name="">
             <a:extLst xmlns:a="http://schemas.openxmlformats.org/drawingml/2006/main">
               <a:ext uri="{FF2B5EF4-FFF2-40B4-BE49-F238E27FC236}">
-                <a16:creationId xmlns:a16="http://schemas.microsoft.com/office/drawing/2014/main" id="{D8C37E9F-D675-49D6-BEBE-FB4354D71720}"/>
+                <a16:creationId xmlns:a16="http://schemas.microsoft.com/office/drawing/2014/main" id="{119C0635-82E3-4398-B1D0-470B619099A4}"/>
               </a:ext>
             </a:extLst>
           </p:cNvPr>
@@ -10583,7 +10783,7 @@
           <p:cNvPr id="12" name="">
             <a:extLst xmlns:a="http://schemas.openxmlformats.org/drawingml/2006/main">
               <a:ext uri="{FF2B5EF4-FFF2-40B4-BE49-F238E27FC236}">
-                <a16:creationId xmlns:a16="http://schemas.microsoft.com/office/drawing/2014/main" id="{B720F652-B1F2-4B0C-9B0D-42FFC1F2A438}"/>
+                <a16:creationId xmlns:a16="http://schemas.microsoft.com/office/drawing/2014/main" id="{A30D1D24-555A-4516-8675-E45FF35567E0}"/>
               </a:ext>
             </a:extLst>
           </p:cNvPr>
@@ -10640,7 +10840,7 @@
           <p:cNvPr id="13" name="">
             <a:extLst xmlns:a="http://schemas.openxmlformats.org/drawingml/2006/main">
               <a:ext uri="{FF2B5EF4-FFF2-40B4-BE49-F238E27FC236}">
-                <a16:creationId xmlns:a16="http://schemas.microsoft.com/office/drawing/2014/main" id="{3AB5B57F-91C4-462D-ACE6-8ECE66BF77BD}"/>
+                <a16:creationId xmlns:a16="http://schemas.microsoft.com/office/drawing/2014/main" id="{F76E7670-8FD7-43FE-8A66-5C1C2093FF06}"/>
               </a:ext>
             </a:extLst>
           </p:cNvPr>
@@ -10697,7 +10897,7 @@
           <p:cNvPr id="14" name="">
             <a:extLst xmlns:a="http://schemas.openxmlformats.org/drawingml/2006/main">
               <a:ext uri="{FF2B5EF4-FFF2-40B4-BE49-F238E27FC236}">
-                <a16:creationId xmlns:a16="http://schemas.microsoft.com/office/drawing/2014/main" id="{123F0738-1F02-4E88-B1A4-9E7DA6F25A1B}"/>
+                <a16:creationId xmlns:a16="http://schemas.microsoft.com/office/drawing/2014/main" id="{72E92AF6-48F1-4976-88D4-85781A39CC6B}"/>
               </a:ext>
             </a:extLst>
           </p:cNvPr>
@@ -10754,7 +10954,7 @@
           <p:cNvPr id="15" name="">
             <a:extLst xmlns:a="http://schemas.openxmlformats.org/drawingml/2006/main">
               <a:ext uri="{FF2B5EF4-FFF2-40B4-BE49-F238E27FC236}">
-                <a16:creationId xmlns:a16="http://schemas.microsoft.com/office/drawing/2014/main" id="{9DAD4446-75CF-4BC0-B5B9-EB3519960B4E}"/>
+                <a16:creationId xmlns:a16="http://schemas.microsoft.com/office/drawing/2014/main" id="{5D557C0C-A52D-403A-A93E-4DB720BBB0D2}"/>
               </a:ext>
             </a:extLst>
           </p:cNvPr>
@@ -10809,7 +11009,7 @@
     </p:spTree>
     <p:extLst>
       <p:ext uri="{BB962C8B-B14F-4D97-AF65-F5344CB8AC3E}">
-        <p14:creationId xmlns:p14="http://schemas.microsoft.com/office/powerpoint/2010/main" val="696611739"/>
+        <p14:creationId xmlns:p14="http://schemas.microsoft.com/office/powerpoint/2010/main" val="1636561987"/>
       </p:ext>
     </p:extLst>
   </p:cSld>
@@ -10964,7 +11164,7 @@
           <p:cNvPr id="16" name="">
             <a:extLst xmlns:a="http://schemas.openxmlformats.org/drawingml/2006/main">
               <a:ext uri="{FF2B5EF4-FFF2-40B4-BE49-F238E27FC236}">
-                <a16:creationId xmlns:a16="http://schemas.microsoft.com/office/drawing/2014/main" id="{EBA09154-5891-4761-9CE8-1B9546C102DA}"/>
+                <a16:creationId xmlns:a16="http://schemas.microsoft.com/office/drawing/2014/main" id="{7E36BBCB-939B-412A-970D-E9220C3940ED}"/>
               </a:ext>
             </a:extLst>
           </p:cNvPr>
@@ -10996,7 +11196,7 @@
           <p:cNvPr id="2" name="">
             <a:extLst xmlns:a="http://schemas.openxmlformats.org/drawingml/2006/main">
               <a:ext uri="{FF2B5EF4-FFF2-40B4-BE49-F238E27FC236}">
-                <a16:creationId xmlns:a16="http://schemas.microsoft.com/office/drawing/2014/main" id="{BAC0B836-6679-4A12-BE1B-44E49A235BD5}"/>
+                <a16:creationId xmlns:a16="http://schemas.microsoft.com/office/drawing/2014/main" id="{CB06F99D-5C82-4577-B136-BBD15FD05866}"/>
               </a:ext>
             </a:extLst>
           </p:cNvPr>
@@ -11053,7 +11253,7 @@
           <p:cNvPr id="3" name="">
             <a:extLst xmlns:a="http://schemas.openxmlformats.org/drawingml/2006/main">
               <a:ext uri="{FF2B5EF4-FFF2-40B4-BE49-F238E27FC236}">
-                <a16:creationId xmlns:a16="http://schemas.microsoft.com/office/drawing/2014/main" id="{39E55426-0AE1-4067-A22F-FCF6A0A626A3}"/>
+                <a16:creationId xmlns:a16="http://schemas.microsoft.com/office/drawing/2014/main" id="{0B28A1F5-0C04-40A9-9077-940C9B81B42B}"/>
               </a:ext>
             </a:extLst>
           </p:cNvPr>
@@ -11085,7 +11285,7 @@
           <p:cNvPr id="4" name="">
             <a:extLst xmlns:a="http://schemas.openxmlformats.org/drawingml/2006/main">
               <a:ext uri="{FF2B5EF4-FFF2-40B4-BE49-F238E27FC236}">
-                <a16:creationId xmlns:a16="http://schemas.microsoft.com/office/drawing/2014/main" id="{7C9563CD-AEC0-4ACD-9FC5-4FB6FB83D451}"/>
+                <a16:creationId xmlns:a16="http://schemas.microsoft.com/office/drawing/2014/main" id="{BA258DF1-7C9D-430D-B128-0AAB44FCF520}"/>
               </a:ext>
             </a:extLst>
           </p:cNvPr>
@@ -11142,7 +11342,7 @@
           <p:cNvPr id="5" name="">
             <a:extLst xmlns:a="http://schemas.openxmlformats.org/drawingml/2006/main">
               <a:ext uri="{FF2B5EF4-FFF2-40B4-BE49-F238E27FC236}">
-                <a16:creationId xmlns:a16="http://schemas.microsoft.com/office/drawing/2014/main" id="{623D6F42-7AAD-463A-9EA8-B441058C7561}"/>
+                <a16:creationId xmlns:a16="http://schemas.microsoft.com/office/drawing/2014/main" id="{644B314A-F772-40AD-887C-C9973DE3F723}"/>
               </a:ext>
             </a:extLst>
           </p:cNvPr>
@@ -11199,7 +11399,7 @@
           <p:cNvPr id="6" name="">
             <a:extLst xmlns:a="http://schemas.openxmlformats.org/drawingml/2006/main">
               <a:ext uri="{FF2B5EF4-FFF2-40B4-BE49-F238E27FC236}">
-                <a16:creationId xmlns:a16="http://schemas.microsoft.com/office/drawing/2014/main" id="{1C9D71F0-9BAB-49AB-9A15-B0E28A32AF70}"/>
+                <a16:creationId xmlns:a16="http://schemas.microsoft.com/office/drawing/2014/main" id="{0AE2C6EF-CD2A-4D0A-B1DB-14EC5099C1EB}"/>
               </a:ext>
             </a:extLst>
           </p:cNvPr>
@@ -11256,7 +11456,7 @@
           <p:cNvPr id="7" name="">
             <a:extLst xmlns:a="http://schemas.openxmlformats.org/drawingml/2006/main">
               <a:ext uri="{FF2B5EF4-FFF2-40B4-BE49-F238E27FC236}">
-                <a16:creationId xmlns:a16="http://schemas.microsoft.com/office/drawing/2014/main" id="{02FF703A-8968-4A72-BC55-51AE81DDCB59}"/>
+                <a16:creationId xmlns:a16="http://schemas.microsoft.com/office/drawing/2014/main" id="{229A0AA6-D78A-4A0C-B2FC-387E545DD62C}"/>
               </a:ext>
             </a:extLst>
           </p:cNvPr>
@@ -11288,7 +11488,7 @@
           <p:cNvPr id="8" name="">
             <a:extLst xmlns:a="http://schemas.openxmlformats.org/drawingml/2006/main">
               <a:ext uri="{FF2B5EF4-FFF2-40B4-BE49-F238E27FC236}">
-                <a16:creationId xmlns:a16="http://schemas.microsoft.com/office/drawing/2014/main" id="{ED37E14F-190D-4362-A06D-325FE0FB401A}"/>
+                <a16:creationId xmlns:a16="http://schemas.microsoft.com/office/drawing/2014/main" id="{468E2030-5C0F-4256-A193-AD785A6550EB}"/>
               </a:ext>
             </a:extLst>
           </p:cNvPr>
@@ -11345,7 +11545,7 @@
           <p:cNvPr id="9" name="">
             <a:extLst xmlns:a="http://schemas.openxmlformats.org/drawingml/2006/main">
               <a:ext uri="{FF2B5EF4-FFF2-40B4-BE49-F238E27FC236}">
-                <a16:creationId xmlns:a16="http://schemas.microsoft.com/office/drawing/2014/main" id="{CEAC31DE-D660-4510-88DA-E88910CD1C90}"/>
+                <a16:creationId xmlns:a16="http://schemas.microsoft.com/office/drawing/2014/main" id="{59D14D82-97F2-421C-AC81-72F4959B6D52}"/>
               </a:ext>
             </a:extLst>
           </p:cNvPr>
@@ -11406,7 +11606,7 @@
           <p:nvPr/>
         </p:nvPicPr>
         <p:blipFill>
-          <a:blip xmlns:r="http://schemas.openxmlformats.org/officeDocument/2006/relationships" xmlns:a="http://schemas.openxmlformats.org/drawingml/2006/main" r:embed="Ra08fd369a4194ded"/>
+          <a:blip xmlns:r="http://schemas.openxmlformats.org/officeDocument/2006/relationships" xmlns:a="http://schemas.openxmlformats.org/drawingml/2006/main" r:embed="Red620faef6cc48f7"/>
           <a:stretch xmlns:a="http://schemas.openxmlformats.org/drawingml/2006/main"/>
         </p:blipFill>
         <p:spPr>
@@ -11424,7 +11624,7 @@
           <p:cNvPr id="11" name="">
             <a:extLst xmlns:a="http://schemas.openxmlformats.org/drawingml/2006/main">
               <a:ext uri="{FF2B5EF4-FFF2-40B4-BE49-F238E27FC236}">
-                <a16:creationId xmlns:a16="http://schemas.microsoft.com/office/drawing/2014/main" id="{0761D7B6-C2BE-41AC-A53A-A889C7127197}"/>
+                <a16:creationId xmlns:a16="http://schemas.microsoft.com/office/drawing/2014/main" id="{BE1E6D24-2AF4-4086-B5F9-265EC2B55F83}"/>
               </a:ext>
             </a:extLst>
           </p:cNvPr>
@@ -11481,7 +11681,7 @@
           <p:cNvPr id="12" name="">
             <a:extLst xmlns:a="http://schemas.openxmlformats.org/drawingml/2006/main">
               <a:ext uri="{FF2B5EF4-FFF2-40B4-BE49-F238E27FC236}">
-                <a16:creationId xmlns:a16="http://schemas.microsoft.com/office/drawing/2014/main" id="{DB46D632-5ADB-4787-A276-9834909122A6}"/>
+                <a16:creationId xmlns:a16="http://schemas.microsoft.com/office/drawing/2014/main" id="{26A7A4CA-C625-4CAE-9E87-F8B7BA50711E}"/>
               </a:ext>
             </a:extLst>
           </p:cNvPr>
@@ -11538,7 +11738,7 @@
           <p:cNvPr id="13" name="">
             <a:extLst xmlns:a="http://schemas.openxmlformats.org/drawingml/2006/main">
               <a:ext uri="{FF2B5EF4-FFF2-40B4-BE49-F238E27FC236}">
-                <a16:creationId xmlns:a16="http://schemas.microsoft.com/office/drawing/2014/main" id="{3CF00601-278E-4F11-A0C3-4AB4EC80FD36}"/>
+                <a16:creationId xmlns:a16="http://schemas.microsoft.com/office/drawing/2014/main" id="{CAE78460-77DA-4D02-9076-49706DDE01EA}"/>
               </a:ext>
             </a:extLst>
           </p:cNvPr>
@@ -11570,7 +11770,7 @@
           <p:cNvPr id="14" name="">
             <a:extLst xmlns:a="http://schemas.openxmlformats.org/drawingml/2006/main">
               <a:ext uri="{FF2B5EF4-FFF2-40B4-BE49-F238E27FC236}">
-                <a16:creationId xmlns:a16="http://schemas.microsoft.com/office/drawing/2014/main" id="{6DACA0DB-E44E-4AD7-A166-1D720CFDD1A0}"/>
+                <a16:creationId xmlns:a16="http://schemas.microsoft.com/office/drawing/2014/main" id="{B1659BB5-3C2E-49AE-B8A0-6234CEB20030}"/>
               </a:ext>
             </a:extLst>
           </p:cNvPr>
@@ -11627,7 +11827,7 @@
           <p:cNvPr id="15" name="">
             <a:extLst xmlns:a="http://schemas.openxmlformats.org/drawingml/2006/main">
               <a:ext uri="{FF2B5EF4-FFF2-40B4-BE49-F238E27FC236}">
-                <a16:creationId xmlns:a16="http://schemas.microsoft.com/office/drawing/2014/main" id="{5C6817CD-50F5-4A96-91AF-0B91C74BAED7}"/>
+                <a16:creationId xmlns:a16="http://schemas.microsoft.com/office/drawing/2014/main" id="{E3013F2C-FF93-4DCD-800C-51EDC8857FF2}"/>
               </a:ext>
             </a:extLst>
           </p:cNvPr>
@@ -11682,7 +11882,7 @@
     </p:spTree>
     <p:extLst>
       <p:ext uri="{BB962C8B-B14F-4D97-AF65-F5344CB8AC3E}">
-        <p14:creationId xmlns:p14="http://schemas.microsoft.com/office/powerpoint/2010/main" val="901672485"/>
+        <p14:creationId xmlns:p14="http://schemas.microsoft.com/office/powerpoint/2010/main" val="42586109"/>
       </p:ext>
     </p:extLst>
   </p:cSld>
@@ -11837,7 +12037,7 @@
           <p:cNvPr id="23" name="">
             <a:extLst xmlns:a="http://schemas.openxmlformats.org/drawingml/2006/main">
               <a:ext uri="{FF2B5EF4-FFF2-40B4-BE49-F238E27FC236}">
-                <a16:creationId xmlns:a16="http://schemas.microsoft.com/office/drawing/2014/main" id="{726738AD-3CB7-4147-972C-6FD119D8B53D}"/>
+                <a16:creationId xmlns:a16="http://schemas.microsoft.com/office/drawing/2014/main" id="{3778B3F1-AF11-438B-B6E7-A2A0A11DCC59}"/>
               </a:ext>
             </a:extLst>
           </p:cNvPr>
@@ -11869,7 +12069,7 @@
           <p:cNvPr id="2" name="">
             <a:extLst xmlns:a="http://schemas.openxmlformats.org/drawingml/2006/main">
               <a:ext uri="{FF2B5EF4-FFF2-40B4-BE49-F238E27FC236}">
-                <a16:creationId xmlns:a16="http://schemas.microsoft.com/office/drawing/2014/main" id="{14CE5421-0E1A-4112-97CC-6C1654DF2BA8}"/>
+                <a16:creationId xmlns:a16="http://schemas.microsoft.com/office/drawing/2014/main" id="{AEA791AA-5C20-4479-BF34-3D620F8A3F69}"/>
               </a:ext>
             </a:extLst>
           </p:cNvPr>
@@ -11926,7 +12126,7 @@
           <p:cNvPr id="3" name="">
             <a:extLst xmlns:a="http://schemas.openxmlformats.org/drawingml/2006/main">
               <a:ext uri="{FF2B5EF4-FFF2-40B4-BE49-F238E27FC236}">
-                <a16:creationId xmlns:a16="http://schemas.microsoft.com/office/drawing/2014/main" id="{3AFBF635-BE93-45B8-BCAC-F31B749EA920}"/>
+                <a16:creationId xmlns:a16="http://schemas.microsoft.com/office/drawing/2014/main" id="{4FD80615-0599-4BB8-90D5-74CB4EE2AE2F}"/>
               </a:ext>
             </a:extLst>
           </p:cNvPr>
@@ -11958,7 +12158,7 @@
           <p:cNvPr id="4" name="">
             <a:extLst xmlns:a="http://schemas.openxmlformats.org/drawingml/2006/main">
               <a:ext uri="{FF2B5EF4-FFF2-40B4-BE49-F238E27FC236}">
-                <a16:creationId xmlns:a16="http://schemas.microsoft.com/office/drawing/2014/main" id="{C2B16DD9-1CA6-4435-ACF3-991D474F7691}"/>
+                <a16:creationId xmlns:a16="http://schemas.microsoft.com/office/drawing/2014/main" id="{9BAEAF85-F6E2-466B-B591-B9A149611621}"/>
               </a:ext>
             </a:extLst>
           </p:cNvPr>
@@ -12015,7 +12215,7 @@
           <p:cNvPr id="5" name="">
             <a:extLst xmlns:a="http://schemas.openxmlformats.org/drawingml/2006/main">
               <a:ext uri="{FF2B5EF4-FFF2-40B4-BE49-F238E27FC236}">
-                <a16:creationId xmlns:a16="http://schemas.microsoft.com/office/drawing/2014/main" id="{3E842306-ACAC-4A27-BC6E-646B0A3D7DFA}"/>
+                <a16:creationId xmlns:a16="http://schemas.microsoft.com/office/drawing/2014/main" id="{8AC76AA0-7C00-4CF6-AD68-066DAFDE19EB}"/>
               </a:ext>
             </a:extLst>
           </p:cNvPr>
@@ -12072,7 +12272,7 @@
           <p:cNvPr id="6" name="">
             <a:extLst xmlns:a="http://schemas.openxmlformats.org/drawingml/2006/main">
               <a:ext uri="{FF2B5EF4-FFF2-40B4-BE49-F238E27FC236}">
-                <a16:creationId xmlns:a16="http://schemas.microsoft.com/office/drawing/2014/main" id="{D472BEF6-8159-4814-B796-6AE1D265A92A}"/>
+                <a16:creationId xmlns:a16="http://schemas.microsoft.com/office/drawing/2014/main" id="{78DA5A98-8D35-480D-8779-3D373623C368}"/>
               </a:ext>
             </a:extLst>
           </p:cNvPr>
@@ -12129,7 +12329,7 @@
           <p:cNvPr id="7" name="">
             <a:extLst xmlns:a="http://schemas.openxmlformats.org/drawingml/2006/main">
               <a:ext uri="{FF2B5EF4-FFF2-40B4-BE49-F238E27FC236}">
-                <a16:creationId xmlns:a16="http://schemas.microsoft.com/office/drawing/2014/main" id="{7293FE01-4762-4C93-A7E9-D30A631D2BCE}"/>
+                <a16:creationId xmlns:a16="http://schemas.microsoft.com/office/drawing/2014/main" id="{81296D7B-B1BC-4A8A-AFC1-A0ADFEE69461}"/>
               </a:ext>
             </a:extLst>
           </p:cNvPr>
@@ -12161,7 +12361,7 @@
           <p:cNvPr id="8" name="">
             <a:extLst xmlns:a="http://schemas.openxmlformats.org/drawingml/2006/main">
               <a:ext uri="{FF2B5EF4-FFF2-40B4-BE49-F238E27FC236}">
-                <a16:creationId xmlns:a16="http://schemas.microsoft.com/office/drawing/2014/main" id="{FA479FA4-E4BB-4245-B5B2-D28BCDA5C970}"/>
+                <a16:creationId xmlns:a16="http://schemas.microsoft.com/office/drawing/2014/main" id="{A6AAE4E2-32BF-4063-ABF9-6F4614D17183}"/>
               </a:ext>
             </a:extLst>
           </p:cNvPr>
@@ -12218,7 +12418,7 @@
           <p:cNvPr id="9" name="">
             <a:extLst xmlns:a="http://schemas.openxmlformats.org/drawingml/2006/main">
               <a:ext uri="{FF2B5EF4-FFF2-40B4-BE49-F238E27FC236}">
-                <a16:creationId xmlns:a16="http://schemas.microsoft.com/office/drawing/2014/main" id="{8A7524F9-AFBA-4173-AB32-C1F73E7FEFBC}"/>
+                <a16:creationId xmlns:a16="http://schemas.microsoft.com/office/drawing/2014/main" id="{F601D9DE-1F93-4418-809C-86C8D0DFEBE8}"/>
               </a:ext>
             </a:extLst>
           </p:cNvPr>
@@ -12275,7 +12475,7 @@
           <p:cNvPr id="10" name="">
             <a:extLst xmlns:a="http://schemas.openxmlformats.org/drawingml/2006/main">
               <a:ext uri="{FF2B5EF4-FFF2-40B4-BE49-F238E27FC236}">
-                <a16:creationId xmlns:a16="http://schemas.microsoft.com/office/drawing/2014/main" id="{17ABE232-5D73-4044-A06E-E7B1BF2DF4AA}"/>
+                <a16:creationId xmlns:a16="http://schemas.microsoft.com/office/drawing/2014/main" id="{64E254DC-CBB8-459B-831E-435B4BD6CB63}"/>
               </a:ext>
             </a:extLst>
           </p:cNvPr>
@@ -12309,7 +12509,7 @@
           <p:cNvPr id="11" name="">
             <a:extLst xmlns:a="http://schemas.openxmlformats.org/drawingml/2006/main">
               <a:ext uri="{FF2B5EF4-FFF2-40B4-BE49-F238E27FC236}">
-                <a16:creationId xmlns:a16="http://schemas.microsoft.com/office/drawing/2014/main" id="{99F1AAC0-54D6-4AD7-8A00-39B8249242AF}"/>
+                <a16:creationId xmlns:a16="http://schemas.microsoft.com/office/drawing/2014/main" id="{4AAFAC7A-DA04-4968-BD6E-BF2E3A94CB69}"/>
               </a:ext>
             </a:extLst>
           </p:cNvPr>
@@ -12341,7 +12541,7 @@
           <p:cNvPr id="12" name="">
             <a:extLst xmlns:a="http://schemas.openxmlformats.org/drawingml/2006/main">
               <a:ext uri="{FF2B5EF4-FFF2-40B4-BE49-F238E27FC236}">
-                <a16:creationId xmlns:a16="http://schemas.microsoft.com/office/drawing/2014/main" id="{426E2A48-2D31-4039-B80B-016C1FB9C90C}"/>
+                <a16:creationId xmlns:a16="http://schemas.microsoft.com/office/drawing/2014/main" id="{EEF74E89-6ECE-40B4-877A-1EFE12B3D81E}"/>
               </a:ext>
             </a:extLst>
           </p:cNvPr>
@@ -12398,7 +12598,7 @@
           <p:cNvPr id="13" name="">
             <a:extLst xmlns:a="http://schemas.openxmlformats.org/drawingml/2006/main">
               <a:ext uri="{FF2B5EF4-FFF2-40B4-BE49-F238E27FC236}">
-                <a16:creationId xmlns:a16="http://schemas.microsoft.com/office/drawing/2014/main" id="{E9C5F861-661C-40FB-90C2-FD33BDC1363C}"/>
+                <a16:creationId xmlns:a16="http://schemas.microsoft.com/office/drawing/2014/main" id="{02E1E9F9-14D4-4F06-9AAE-B565E04DA02F}"/>
               </a:ext>
             </a:extLst>
           </p:cNvPr>
@@ -12455,7 +12655,7 @@
           <p:cNvPr id="14" name="">
             <a:extLst xmlns:a="http://schemas.openxmlformats.org/drawingml/2006/main">
               <a:ext uri="{FF2B5EF4-FFF2-40B4-BE49-F238E27FC236}">
-                <a16:creationId xmlns:a16="http://schemas.microsoft.com/office/drawing/2014/main" id="{C0633EA4-CFA7-4064-89FD-771F59E2FE57}"/>
+                <a16:creationId xmlns:a16="http://schemas.microsoft.com/office/drawing/2014/main" id="{64C26C32-39B3-42E9-80B7-2EFACEC75290}"/>
               </a:ext>
             </a:extLst>
           </p:cNvPr>
@@ -12489,7 +12689,7 @@
           <p:cNvPr id="15" name="">
             <a:extLst xmlns:a="http://schemas.openxmlformats.org/drawingml/2006/main">
               <a:ext uri="{FF2B5EF4-FFF2-40B4-BE49-F238E27FC236}">
-                <a16:creationId xmlns:a16="http://schemas.microsoft.com/office/drawing/2014/main" id="{D71AB70F-73AE-4D08-82E8-7E0BF97F0A41}"/>
+                <a16:creationId xmlns:a16="http://schemas.microsoft.com/office/drawing/2014/main" id="{85491456-2C36-43F2-BBA0-E67C6106E0CB}"/>
               </a:ext>
             </a:extLst>
           </p:cNvPr>
@@ -12521,7 +12721,7 @@
           <p:cNvPr id="16" name="">
             <a:extLst xmlns:a="http://schemas.openxmlformats.org/drawingml/2006/main">
               <a:ext uri="{FF2B5EF4-FFF2-40B4-BE49-F238E27FC236}">
-                <a16:creationId xmlns:a16="http://schemas.microsoft.com/office/drawing/2014/main" id="{76464573-CF72-4D85-B7CF-5F7F9F872FCD}"/>
+                <a16:creationId xmlns:a16="http://schemas.microsoft.com/office/drawing/2014/main" id="{24D9658C-430A-42FF-A185-6C36FA7A84E0}"/>
               </a:ext>
             </a:extLst>
           </p:cNvPr>
@@ -12578,7 +12778,7 @@
           <p:cNvPr id="17" name="">
             <a:extLst xmlns:a="http://schemas.openxmlformats.org/drawingml/2006/main">
               <a:ext uri="{FF2B5EF4-FFF2-40B4-BE49-F238E27FC236}">
-                <a16:creationId xmlns:a16="http://schemas.microsoft.com/office/drawing/2014/main" id="{432BE475-D638-45C9-B2E2-585E0D0011BD}"/>
+                <a16:creationId xmlns:a16="http://schemas.microsoft.com/office/drawing/2014/main" id="{E3F58D2E-3009-4D2F-9722-27669D031C2E}"/>
               </a:ext>
             </a:extLst>
           </p:cNvPr>
@@ -12635,7 +12835,7 @@
           <p:cNvPr id="18" name="">
             <a:extLst xmlns:a="http://schemas.openxmlformats.org/drawingml/2006/main">
               <a:ext uri="{FF2B5EF4-FFF2-40B4-BE49-F238E27FC236}">
-                <a16:creationId xmlns:a16="http://schemas.microsoft.com/office/drawing/2014/main" id="{64690D47-0328-4B4A-AF8E-AEBDA2C9D2F8}"/>
+                <a16:creationId xmlns:a16="http://schemas.microsoft.com/office/drawing/2014/main" id="{39238919-DA08-4AC0-85B3-62CF873BFD43}"/>
               </a:ext>
             </a:extLst>
           </p:cNvPr>
@@ -12669,7 +12869,7 @@
           <p:cNvPr id="19" name="">
             <a:extLst xmlns:a="http://schemas.openxmlformats.org/drawingml/2006/main">
               <a:ext uri="{FF2B5EF4-FFF2-40B4-BE49-F238E27FC236}">
-                <a16:creationId xmlns:a16="http://schemas.microsoft.com/office/drawing/2014/main" id="{8996A04C-2208-40B8-B480-8661DB54B644}"/>
+                <a16:creationId xmlns:a16="http://schemas.microsoft.com/office/drawing/2014/main" id="{AAD929E7-F980-4C9F-B9C4-86E7AF397F28}"/>
               </a:ext>
             </a:extLst>
           </p:cNvPr>
@@ -12701,7 +12901,7 @@
           <p:cNvPr id="20" name="">
             <a:extLst xmlns:a="http://schemas.openxmlformats.org/drawingml/2006/main">
               <a:ext uri="{FF2B5EF4-FFF2-40B4-BE49-F238E27FC236}">
-                <a16:creationId xmlns:a16="http://schemas.microsoft.com/office/drawing/2014/main" id="{F6F50A1B-7DEC-4E2C-A66B-4919C4412AFA}"/>
+                <a16:creationId xmlns:a16="http://schemas.microsoft.com/office/drawing/2014/main" id="{B1A78B07-3B65-4DDF-A71A-233E4DD5642E}"/>
               </a:ext>
             </a:extLst>
           </p:cNvPr>
@@ -12758,7 +12958,7 @@
           <p:cNvPr id="21" name="">
             <a:extLst xmlns:a="http://schemas.openxmlformats.org/drawingml/2006/main">
               <a:ext uri="{FF2B5EF4-FFF2-40B4-BE49-F238E27FC236}">
-                <a16:creationId xmlns:a16="http://schemas.microsoft.com/office/drawing/2014/main" id="{763DBA21-0FD8-4044-A328-5ED2F2745008}"/>
+                <a16:creationId xmlns:a16="http://schemas.microsoft.com/office/drawing/2014/main" id="{BD252468-9326-4A11-8E6B-A342D81878CC}"/>
               </a:ext>
             </a:extLst>
           </p:cNvPr>
@@ -12815,7 +13015,7 @@
           <p:cNvPr id="22" name="">
             <a:extLst xmlns:a="http://schemas.openxmlformats.org/drawingml/2006/main">
               <a:ext uri="{FF2B5EF4-FFF2-40B4-BE49-F238E27FC236}">
-                <a16:creationId xmlns:a16="http://schemas.microsoft.com/office/drawing/2014/main" id="{643998CA-F5AA-4BCB-9CB4-F2E8634A6A10}"/>
+                <a16:creationId xmlns:a16="http://schemas.microsoft.com/office/drawing/2014/main" id="{C8423A80-2ED0-44DB-9F41-BE486B341C49}"/>
               </a:ext>
             </a:extLst>
           </p:cNvPr>
@@ -12870,7 +13070,7 @@
     </p:spTree>
     <p:extLst>
       <p:ext uri="{BB962C8B-B14F-4D97-AF65-F5344CB8AC3E}">
-        <p14:creationId xmlns:p14="http://schemas.microsoft.com/office/powerpoint/2010/main" val="1275521439"/>
+        <p14:creationId xmlns:p14="http://schemas.microsoft.com/office/powerpoint/2010/main" val="1827370526"/>
       </p:ext>
     </p:extLst>
   </p:cSld>
@@ -13071,7 +13271,7 @@
           <p:cNvPr id="22" name="">
             <a:extLst xmlns:a="http://schemas.openxmlformats.org/drawingml/2006/main">
               <a:ext uri="{FF2B5EF4-FFF2-40B4-BE49-F238E27FC236}">
-                <a16:creationId xmlns:a16="http://schemas.microsoft.com/office/drawing/2014/main" id="{01407DDF-0D19-40C3-95C6-6819302F4B0B}"/>
+                <a16:creationId xmlns:a16="http://schemas.microsoft.com/office/drawing/2014/main" id="{4B2E7D04-5A74-4751-AC5D-CEB7C55699BD}"/>
               </a:ext>
             </a:extLst>
           </p:cNvPr>
@@ -13103,7 +13303,7 @@
           <p:cNvPr id="2" name="">
             <a:extLst xmlns:a="http://schemas.openxmlformats.org/drawingml/2006/main">
               <a:ext uri="{FF2B5EF4-FFF2-40B4-BE49-F238E27FC236}">
-                <a16:creationId xmlns:a16="http://schemas.microsoft.com/office/drawing/2014/main" id="{A7C88E3E-221C-43DF-AD41-81829E9B2FB8}"/>
+                <a16:creationId xmlns:a16="http://schemas.microsoft.com/office/drawing/2014/main" id="{02BF7CD3-A8FB-4E81-B4D5-40E8A59818A7}"/>
               </a:ext>
             </a:extLst>
           </p:cNvPr>
@@ -13160,7 +13360,7 @@
           <p:cNvPr id="3" name="">
             <a:extLst xmlns:a="http://schemas.openxmlformats.org/drawingml/2006/main">
               <a:ext uri="{FF2B5EF4-FFF2-40B4-BE49-F238E27FC236}">
-                <a16:creationId xmlns:a16="http://schemas.microsoft.com/office/drawing/2014/main" id="{A849B1FD-8008-4F62-A09C-1B4B46C18C13}"/>
+                <a16:creationId xmlns:a16="http://schemas.microsoft.com/office/drawing/2014/main" id="{B888D0EF-CED6-4694-82F7-4C08CD69878D}"/>
               </a:ext>
             </a:extLst>
           </p:cNvPr>
@@ -13192,7 +13392,7 @@
           <p:cNvPr id="4" name="">
             <a:extLst xmlns:a="http://schemas.openxmlformats.org/drawingml/2006/main">
               <a:ext uri="{FF2B5EF4-FFF2-40B4-BE49-F238E27FC236}">
-                <a16:creationId xmlns:a16="http://schemas.microsoft.com/office/drawing/2014/main" id="{3F7DCEC2-8100-4689-B36F-A8F285190885}"/>
+                <a16:creationId xmlns:a16="http://schemas.microsoft.com/office/drawing/2014/main" id="{2F31CA62-5F9D-442C-B57B-2B2DDA7B23FE}"/>
               </a:ext>
             </a:extLst>
           </p:cNvPr>
@@ -13249,7 +13449,7 @@
           <p:cNvPr id="5" name="">
             <a:extLst xmlns:a="http://schemas.openxmlformats.org/drawingml/2006/main">
               <a:ext uri="{FF2B5EF4-FFF2-40B4-BE49-F238E27FC236}">
-                <a16:creationId xmlns:a16="http://schemas.microsoft.com/office/drawing/2014/main" id="{5146CF43-FC90-4DFD-AB83-68DDD7DF3794}"/>
+                <a16:creationId xmlns:a16="http://schemas.microsoft.com/office/drawing/2014/main" id="{44ED988E-D3D4-461A-A7F6-12B6D16B70BB}"/>
               </a:ext>
             </a:extLst>
           </p:cNvPr>
@@ -13306,7 +13506,7 @@
           <p:cNvPr id="6" name="">
             <a:extLst xmlns:a="http://schemas.openxmlformats.org/drawingml/2006/main">
               <a:ext uri="{FF2B5EF4-FFF2-40B4-BE49-F238E27FC236}">
-                <a16:creationId xmlns:a16="http://schemas.microsoft.com/office/drawing/2014/main" id="{1F390BD8-1BDA-4E76-9B4A-B357C2E3046C}"/>
+                <a16:creationId xmlns:a16="http://schemas.microsoft.com/office/drawing/2014/main" id="{50D884C0-07CA-4D19-AA8B-623D5A9E80F8}"/>
               </a:ext>
             </a:extLst>
           </p:cNvPr>
@@ -13363,7 +13563,7 @@
           <p:cNvPr id="7" name="">
             <a:extLst xmlns:a="http://schemas.openxmlformats.org/drawingml/2006/main">
               <a:ext uri="{FF2B5EF4-FFF2-40B4-BE49-F238E27FC236}">
-                <a16:creationId xmlns:a16="http://schemas.microsoft.com/office/drawing/2014/main" id="{BE226477-D00A-492E-8022-F99CA1B9AEA1}"/>
+                <a16:creationId xmlns:a16="http://schemas.microsoft.com/office/drawing/2014/main" id="{A4EEED92-2509-4CBD-BC2F-75BE22253E3E}"/>
               </a:ext>
             </a:extLst>
           </p:cNvPr>
@@ -13395,7 +13595,7 @@
           <p:cNvPr id="8" name="">
             <a:extLst xmlns:a="http://schemas.openxmlformats.org/drawingml/2006/main">
               <a:ext uri="{FF2B5EF4-FFF2-40B4-BE49-F238E27FC236}">
-                <a16:creationId xmlns:a16="http://schemas.microsoft.com/office/drawing/2014/main" id="{F4E600F4-FE94-40B6-B64D-1263D4CA5D99}"/>
+                <a16:creationId xmlns:a16="http://schemas.microsoft.com/office/drawing/2014/main" id="{EAD192EA-9E94-4DD8-AB83-AB2AE0C219C6}"/>
               </a:ext>
             </a:extLst>
           </p:cNvPr>
@@ -13452,7 +13652,7 @@
           <p:cNvPr id="9" name="">
             <a:extLst xmlns:a="http://schemas.openxmlformats.org/drawingml/2006/main">
               <a:ext uri="{FF2B5EF4-FFF2-40B4-BE49-F238E27FC236}">
-                <a16:creationId xmlns:a16="http://schemas.microsoft.com/office/drawing/2014/main" id="{2FCAF111-1A4F-4D67-BBBC-9038BF4DE3AE}"/>
+                <a16:creationId xmlns:a16="http://schemas.microsoft.com/office/drawing/2014/main" id="{14C92ED7-2D2C-4C78-9A5C-2A2311C030FD}"/>
               </a:ext>
             </a:extLst>
           </p:cNvPr>
@@ -13509,7 +13709,7 @@
           <p:cNvPr id="10" name="">
             <a:extLst xmlns:a="http://schemas.openxmlformats.org/drawingml/2006/main">
               <a:ext uri="{FF2B5EF4-FFF2-40B4-BE49-F238E27FC236}">
-                <a16:creationId xmlns:a16="http://schemas.microsoft.com/office/drawing/2014/main" id="{377DFB45-C4E2-4F06-A503-D56AD37C513A}"/>
+                <a16:creationId xmlns:a16="http://schemas.microsoft.com/office/drawing/2014/main" id="{B8EB1B93-F62B-4CDA-BBC8-BF6620CC01F6}"/>
               </a:ext>
             </a:extLst>
           </p:cNvPr>
@@ -13543,7 +13743,7 @@
           <p:cNvPr id="11" name="">
             <a:extLst xmlns:a="http://schemas.openxmlformats.org/drawingml/2006/main">
               <a:ext uri="{FF2B5EF4-FFF2-40B4-BE49-F238E27FC236}">
-                <a16:creationId xmlns:a16="http://schemas.microsoft.com/office/drawing/2014/main" id="{4D619AB0-5D12-426B-8E26-C32B60C41F8F}"/>
+                <a16:creationId xmlns:a16="http://schemas.microsoft.com/office/drawing/2014/main" id="{B7248DAB-E691-452A-8821-1E06EFCBF770}"/>
               </a:ext>
             </a:extLst>
           </p:cNvPr>
@@ -13575,7 +13775,7 @@
           <p:cNvPr id="12" name="">
             <a:extLst xmlns:a="http://schemas.openxmlformats.org/drawingml/2006/main">
               <a:ext uri="{FF2B5EF4-FFF2-40B4-BE49-F238E27FC236}">
-                <a16:creationId xmlns:a16="http://schemas.microsoft.com/office/drawing/2014/main" id="{606DB785-06F7-4702-BC61-783F39D7E485}"/>
+                <a16:creationId xmlns:a16="http://schemas.microsoft.com/office/drawing/2014/main" id="{6CB80344-414A-47E9-A48E-E62DE0085D09}"/>
               </a:ext>
             </a:extLst>
           </p:cNvPr>
@@ -13632,7 +13832,7 @@
           <p:cNvPr id="13" name="">
             <a:extLst xmlns:a="http://schemas.openxmlformats.org/drawingml/2006/main">
               <a:ext uri="{FF2B5EF4-FFF2-40B4-BE49-F238E27FC236}">
-                <a16:creationId xmlns:a16="http://schemas.microsoft.com/office/drawing/2014/main" id="{A2CE798F-0C5B-44AC-A7A6-3E249671D0D1}"/>
+                <a16:creationId xmlns:a16="http://schemas.microsoft.com/office/drawing/2014/main" id="{EC3DB135-D190-49BE-BD46-26612D1CCC01}"/>
               </a:ext>
             </a:extLst>
           </p:cNvPr>
@@ -13689,7 +13889,7 @@
           <p:cNvPr id="14" name="">
             <a:extLst xmlns:a="http://schemas.openxmlformats.org/drawingml/2006/main">
               <a:ext uri="{FF2B5EF4-FFF2-40B4-BE49-F238E27FC236}">
-                <a16:creationId xmlns:a16="http://schemas.microsoft.com/office/drawing/2014/main" id="{A44694B5-63BD-4FB5-B018-43A5B6CC8E39}"/>
+                <a16:creationId xmlns:a16="http://schemas.microsoft.com/office/drawing/2014/main" id="{E81954A0-B2E3-4F3F-8291-BBCC7940758A}"/>
               </a:ext>
             </a:extLst>
           </p:cNvPr>
@@ -13723,7 +13923,7 @@
           <p:cNvPr id="15" name="">
             <a:extLst xmlns:a="http://schemas.openxmlformats.org/drawingml/2006/main">
               <a:ext uri="{FF2B5EF4-FFF2-40B4-BE49-F238E27FC236}">
-                <a16:creationId xmlns:a16="http://schemas.microsoft.com/office/drawing/2014/main" id="{21F5B913-62D5-422A-900A-7E81ABB1E2F2}"/>
+                <a16:creationId xmlns:a16="http://schemas.microsoft.com/office/drawing/2014/main" id="{15495F39-41B8-43F3-A0A7-DA7022DB9C0B}"/>
               </a:ext>
             </a:extLst>
           </p:cNvPr>
@@ -13755,7 +13955,7 @@
           <p:cNvPr id="16" name="">
             <a:extLst xmlns:a="http://schemas.openxmlformats.org/drawingml/2006/main">
               <a:ext uri="{FF2B5EF4-FFF2-40B4-BE49-F238E27FC236}">
-                <a16:creationId xmlns:a16="http://schemas.microsoft.com/office/drawing/2014/main" id="{5A826E42-662C-40F2-A452-94DD0113EC2A}"/>
+                <a16:creationId xmlns:a16="http://schemas.microsoft.com/office/drawing/2014/main" id="{DB330923-C2DD-45F1-A4C0-65E232AF06D8}"/>
               </a:ext>
             </a:extLst>
           </p:cNvPr>
@@ -13812,7 +14012,7 @@
           <p:cNvPr id="17" name="">
             <a:extLst xmlns:a="http://schemas.openxmlformats.org/drawingml/2006/main">
               <a:ext uri="{FF2B5EF4-FFF2-40B4-BE49-F238E27FC236}">
-                <a16:creationId xmlns:a16="http://schemas.microsoft.com/office/drawing/2014/main" id="{A4801D39-0C9D-415F-861E-C4B4DC372D62}"/>
+                <a16:creationId xmlns:a16="http://schemas.microsoft.com/office/drawing/2014/main" id="{BC28E1CD-6EE2-491C-8382-3687D9F5A520}"/>
               </a:ext>
             </a:extLst>
           </p:cNvPr>
@@ -13869,7 +14069,7 @@
           <p:cNvPr id="18" name="">
             <a:extLst xmlns:a="http://schemas.openxmlformats.org/drawingml/2006/main">
               <a:ext uri="{FF2B5EF4-FFF2-40B4-BE49-F238E27FC236}">
-                <a16:creationId xmlns:a16="http://schemas.microsoft.com/office/drawing/2014/main" id="{33AEECEF-BFBE-4B9B-BA89-8DD092A20F52}"/>
+                <a16:creationId xmlns:a16="http://schemas.microsoft.com/office/drawing/2014/main" id="{52DB6F8D-826C-4276-9D34-7B763ADCF839}"/>
               </a:ext>
             </a:extLst>
           </p:cNvPr>
@@ -13903,7 +14103,7 @@
           <p:cNvPr id="19" name="">
             <a:extLst xmlns:a="http://schemas.openxmlformats.org/drawingml/2006/main">
               <a:ext uri="{FF2B5EF4-FFF2-40B4-BE49-F238E27FC236}">
-                <a16:creationId xmlns:a16="http://schemas.microsoft.com/office/drawing/2014/main" id="{0B2F5849-0BB2-49A3-B784-69253F8CE358}"/>
+                <a16:creationId xmlns:a16="http://schemas.microsoft.com/office/drawing/2014/main" id="{C9355A55-C1CC-49B0-A5B7-FEC4384B3ECE}"/>
               </a:ext>
             </a:extLst>
           </p:cNvPr>
@@ -13935,7 +14135,7 @@
           <p:cNvPr id="20" name="">
             <a:extLst xmlns:a="http://schemas.openxmlformats.org/drawingml/2006/main">
               <a:ext uri="{FF2B5EF4-FFF2-40B4-BE49-F238E27FC236}">
-                <a16:creationId xmlns:a16="http://schemas.microsoft.com/office/drawing/2014/main" id="{5A44C91F-B142-4C8C-8CF9-1A838A104C8A}"/>
+                <a16:creationId xmlns:a16="http://schemas.microsoft.com/office/drawing/2014/main" id="{52BC2D9D-C506-4782-A53D-7B6ACA9CB33C}"/>
               </a:ext>
             </a:extLst>
           </p:cNvPr>
@@ -13992,7 +14192,7 @@
           <p:cNvPr id="21" name="">
             <a:extLst xmlns:a="http://schemas.openxmlformats.org/drawingml/2006/main">
               <a:ext uri="{FF2B5EF4-FFF2-40B4-BE49-F238E27FC236}">
-                <a16:creationId xmlns:a16="http://schemas.microsoft.com/office/drawing/2014/main" id="{669963D9-4F71-4B69-A9D7-DAAA5AF16F69}"/>
+                <a16:creationId xmlns:a16="http://schemas.microsoft.com/office/drawing/2014/main" id="{D3C1A0BF-F2F3-4389-B376-4BFD7547CBDF}"/>
               </a:ext>
             </a:extLst>
           </p:cNvPr>
@@ -14047,7 +14247,7 @@
     </p:spTree>
     <p:extLst>
       <p:ext uri="{BB962C8B-B14F-4D97-AF65-F5344CB8AC3E}">
-        <p14:creationId xmlns:p14="http://schemas.microsoft.com/office/powerpoint/2010/main" val="999631491"/>
+        <p14:creationId xmlns:p14="http://schemas.microsoft.com/office/powerpoint/2010/main" val="1289248580"/>
       </p:ext>
     </p:extLst>
   </p:cSld>
